--- a/docs/demo/Sabercast_Pitch_Slide.pptx
+++ b/docs/demo/Sabercast_Pitch_Slide.pptx
@@ -3968,7 +3968,7 @@
                 </a:solidFill>
                 <a:latin typeface="Calibri"/>
               </a:rPr>
-              <a:t>Flagged top-1 position underperforms next year at</a:t>
+              <a:t>Flagged top-1 position underperforms next year</a:t>
             </a:r>
           </a:p>
           <a:p>
@@ -3980,7 +3980,7 @@
                 </a:solidFill>
                 <a:latin typeface="Calibri"/>
               </a:rPr>
-              <a:t>71.9% (2B, p=0.020) and 75.0% (LF, p=0.041)</a:t>
+              <a:t>59.9% overall (p=0.012)  ·  74.2% at 2B (p=0.011)</a:t>
             </a:r>
           </a:p>
         </p:txBody>
@@ -4062,7 +4062,7 @@
                 </a:solidFill>
                 <a:latin typeface="Calibri"/>
               </a:rPr>
-              <a:t>loses to last-year-wins autocorrelation by ~8×.</a:t>
+              <a:t>loses to last-year-wins autocorrelation by ~5×.</a:t>
             </a:r>
           </a:p>
           <a:p>

--- a/docs/demo/Sabercast_Pitch_Slide.pptx
+++ b/docs/demo/Sabercast_Pitch_Slide.pptx
@@ -3816,7 +3816,7 @@
                 </a:solidFill>
                 <a:latin typeface="Calibri"/>
               </a:rPr>
-              <a:t>RESULTS — 9 pre-registered tests, 2 significant</a:t>
+              <a:t>RESULTS — 10 pre-registered tests, 4 significant</a:t>
             </a:r>
           </a:p>
         </p:txBody>
@@ -3829,8 +3829,8 @@
         </p:nvSpPr>
         <p:spPr>
           <a:xfrm>
-            <a:off x="8595360" y="2286000"/>
-            <a:ext cx="3703320" cy="320040"/>
+            <a:off x="8595360" y="2240280"/>
+            <a:ext cx="3703320" cy="256032"/>
           </a:xfrm>
           <a:prstGeom prst="rect">
             <a:avLst/>
@@ -3845,13 +3845,13 @@
           <a:p>
             <a:pPr algn="l"/>
             <a:r>
-              <a:rPr sz="1300" b="1">
+              <a:rPr sz="1150" b="1">
                 <a:solidFill>
                   <a:srgbClr val="2E863E"/>
                 </a:solidFill>
                 <a:latin typeface="Calibri"/>
               </a:rPr>
-              <a:t>RAG retrieval validated</a:t>
+              <a:t>RAG accuracy delta</a:t>
             </a:r>
           </a:p>
         </p:txBody>
@@ -3864,8 +3864,8 @@
         </p:nvSpPr>
         <p:spPr>
           <a:xfrm>
-            <a:off x="8595360" y="2560320"/>
-            <a:ext cx="3703320" cy="502920"/>
+            <a:off x="8595360" y="2468880"/>
+            <a:ext cx="3703320" cy="365760"/>
           </a:xfrm>
           <a:prstGeom prst="rect">
             <a:avLst/>
@@ -3880,25 +3880,25 @@
           <a:p>
             <a:pPr algn="l"/>
             <a:r>
-              <a:rPr sz="1150" b="0">
+              <a:rPr sz="1050" b="0">
                 <a:solidFill>
                   <a:srgbClr val="334455"/>
                 </a:solidFill>
                 <a:latin typeface="Calibri"/>
               </a:rPr>
-              <a:t>+70 percentage-point accuracy gain on 20-question</a:t>
-            </a:r>
-          </a:p>
-          <a:p>
-            <a:pPr algn="l"/>
-            <a:r>
-              <a:rPr sz="1150" b="0">
+              <a:t>+70 pp gain on 20 held-out questions</a:t>
+            </a:r>
+          </a:p>
+          <a:p>
+            <a:pPr algn="l"/>
+            <a:r>
+              <a:rPr sz="1050" b="0">
                 <a:solidFill>
                   <a:srgbClr val="334455"/>
                 </a:solidFill>
                 <a:latin typeface="Calibri"/>
               </a:rPr>
-              <a:t>held-out set  ·  McNemar exact p = 0.0005</a:t>
+              <a:t>McNemar p = 0.0005</a:t>
             </a:r>
           </a:p>
         </p:txBody>
@@ -3911,8 +3911,8 @@
         </p:nvSpPr>
         <p:spPr>
           <a:xfrm>
-            <a:off x="8595360" y="3154680"/>
-            <a:ext cx="3703320" cy="320040"/>
+            <a:off x="8595360" y="2926080"/>
+            <a:ext cx="3703320" cy="256032"/>
           </a:xfrm>
           <a:prstGeom prst="rect">
             <a:avLst/>
@@ -3927,13 +3927,13 @@
           <a:p>
             <a:pPr algn="l"/>
             <a:r>
-              <a:rPr sz="1300" b="1">
+              <a:rPr sz="1150" b="1">
                 <a:solidFill>
                   <a:srgbClr val="2E863E"/>
                 </a:solidFill>
                 <a:latin typeface="Calibri"/>
               </a:rPr>
-              <a:t>Position-level diagnostic validated</a:t>
+              <a:t>Player-matcher precision@10</a:t>
             </a:r>
           </a:p>
         </p:txBody>
@@ -3946,8 +3946,8 @@
         </p:nvSpPr>
         <p:spPr>
           <a:xfrm>
-            <a:off x="8595360" y="3429000"/>
-            <a:ext cx="3703320" cy="502920"/>
+            <a:off x="8595360" y="3154680"/>
+            <a:ext cx="3703320" cy="365760"/>
           </a:xfrm>
           <a:prstGeom prst="rect">
             <a:avLst/>
@@ -3962,25 +3962,25 @@
           <a:p>
             <a:pPr algn="l"/>
             <a:r>
-              <a:rPr sz="1150" b="0">
+              <a:rPr sz="1050" b="0">
                 <a:solidFill>
                   <a:srgbClr val="334455"/>
                 </a:solidFill>
                 <a:latin typeface="Calibri"/>
               </a:rPr>
-              <a:t>Flagged top-1 position underperforms next year</a:t>
-            </a:r>
-          </a:p>
-          <a:p>
-            <a:pPr algn="l"/>
-            <a:r>
-              <a:rPr sz="1150" b="0">
+              <a:t>41.9% vs 13.3% random (3.1× lift, n=43)</a:t>
+            </a:r>
+          </a:p>
+          <a:p>
+            <a:pPr algn="l"/>
+            <a:r>
+              <a:rPr sz="1050" b="0">
                 <a:solidFill>
                   <a:srgbClr val="334455"/>
                 </a:solidFill>
                 <a:latin typeface="Calibri"/>
               </a:rPr>
-              <a:t>59.9% overall (p=0.012)  ·  74.2% at 2B (p=0.011)</a:t>
+              <a:t>z = 5.66, p &lt; 0.0001 — top-K finds actual signings</a:t>
             </a:r>
           </a:p>
         </p:txBody>
@@ -3993,8 +3993,8 @@
         </p:nvSpPr>
         <p:spPr>
           <a:xfrm>
-            <a:off x="8595360" y="4023360"/>
-            <a:ext cx="3703320" cy="320040"/>
+            <a:off x="8595360" y="3611880"/>
+            <a:ext cx="3703320" cy="256032"/>
           </a:xfrm>
           <a:prstGeom prst="rect">
             <a:avLst/>
@@ -4009,13 +4009,13 @@
           <a:p>
             <a:pPr algn="l"/>
             <a:r>
-              <a:rPr sz="1300" b="1">
-                <a:solidFill>
-                  <a:srgbClr val="C08C00"/>
-                </a:solidFill>
-                <a:latin typeface="Calibri"/>
-              </a:rPr>
-              <a:t>Honest null reported</a:t>
+              <a:rPr sz="1150" b="1">
+                <a:solidFill>
+                  <a:srgbClr val="2E863E"/>
+                </a:solidFill>
+                <a:latin typeface="Calibri"/>
+              </a:rPr>
+              <a:t>Position-level diagnostic</a:t>
             </a:r>
           </a:p>
         </p:txBody>
@@ -4028,8 +4028,8 @@
         </p:nvSpPr>
         <p:spPr>
           <a:xfrm>
-            <a:off x="8595360" y="4297680"/>
-            <a:ext cx="3703320" cy="777240"/>
+            <a:off x="8595360" y="3840480"/>
+            <a:ext cx="3703320" cy="365760"/>
           </a:xfrm>
           <a:prstGeom prst="rect">
             <a:avLst/>
@@ -4044,62 +4044,132 @@
           <a:p>
             <a:pPr algn="l"/>
             <a:r>
-              <a:rPr sz="1150" b="0">
+              <a:rPr sz="1050" b="0">
                 <a:solidFill>
                   <a:srgbClr val="334455"/>
                 </a:solidFill>
                 <a:latin typeface="Calibri"/>
               </a:rPr>
+              <a:t>Flagged position underperforms 59.9% overall</a:t>
+            </a:r>
+          </a:p>
+          <a:p>
+            <a:pPr algn="l"/>
+            <a:r>
+              <a:rPr sz="1050" b="0">
+                <a:solidFill>
+                  <a:srgbClr val="334455"/>
+                </a:solidFill>
+                <a:latin typeface="Calibri"/>
+              </a:rPr>
+              <a:t>(p=0.012)  ·  2B 74.2% (p=0.011)</a:t>
+            </a:r>
+          </a:p>
+        </p:txBody>
+      </p:sp>
+      <p:sp>
+        <p:nvSpPr>
+          <p:cNvPr id="19" name="TextBox 18"/>
+          <p:cNvSpPr txBox="1"/>
+          <p:nvPr/>
+        </p:nvSpPr>
+        <p:spPr>
+          <a:xfrm>
+            <a:off x="8595360" y="4297680"/>
+            <a:ext cx="3703320" cy="256032"/>
+          </a:xfrm>
+          <a:prstGeom prst="rect">
+            <a:avLst/>
+          </a:prstGeom>
+          <a:noFill/>
+        </p:spPr>
+        <p:txBody>
+          <a:bodyPr wrap="square" lIns="45720" rIns="45720" tIns="18288" bIns="18288">
+            <a:spAutoFit/>
+          </a:bodyPr>
+          <a:lstStyle/>
+          <a:p>
+            <a:pPr algn="l"/>
+            <a:r>
+              <a:rPr sz="1150" b="1">
+                <a:solidFill>
+                  <a:srgbClr val="C08C00"/>
+                </a:solidFill>
+                <a:latin typeface="Calibri"/>
+              </a:rPr>
+              <a:t>Honest null reported</a:t>
+            </a:r>
+          </a:p>
+        </p:txBody>
+      </p:sp>
+      <p:sp>
+        <p:nvSpPr>
+          <p:cNvPr id="20" name="TextBox 19"/>
+          <p:cNvSpPr txBox="1"/>
+          <p:nvPr/>
+        </p:nvSpPr>
+        <p:spPr>
+          <a:xfrm>
+            <a:off x="8595360" y="4526280"/>
+            <a:ext cx="3703320" cy="640080"/>
+          </a:xfrm>
+          <a:prstGeom prst="rect">
+            <a:avLst/>
+          </a:prstGeom>
+          <a:noFill/>
+        </p:spPr>
+        <p:txBody>
+          <a:bodyPr wrap="square" lIns="45720" rIns="45720" tIns="18288" bIns="18288">
+            <a:spAutoFit/>
+          </a:bodyPr>
+          <a:lstStyle/>
+          <a:p>
+            <a:pPr algn="l"/>
+            <a:r>
+              <a:rPr sz="1050" b="0">
+                <a:solidFill>
+                  <a:srgbClr val="334455"/>
+                </a:solidFill>
+                <a:latin typeface="Calibri"/>
+              </a:rPr>
               <a:t>Gap_score does NOT predict next-year wins —</a:t>
             </a:r>
           </a:p>
           <a:p>
             <a:pPr algn="l"/>
             <a:r>
-              <a:rPr sz="1150" b="0">
+              <a:rPr sz="1050" b="0">
                 <a:solidFill>
                   <a:srgbClr val="334455"/>
                 </a:solidFill>
                 <a:latin typeface="Calibri"/>
               </a:rPr>
-              <a:t>loses to last-year-wins autocorrelation by ~5×.</a:t>
-            </a:r>
-          </a:p>
-          <a:p>
-            <a:pPr algn="l"/>
-            <a:r>
-              <a:rPr sz="1150" b="0">
+              <a:t>loses to autocorrelation ~5×. Five independent</a:t>
+            </a:r>
+          </a:p>
+          <a:p>
+            <a:pPr algn="l"/>
+            <a:r>
+              <a:rPr sz="1050" b="0">
                 <a:solidFill>
                   <a:srgbClr val="334455"/>
                 </a:solidFill>
                 <a:latin typeface="Calibri"/>
               </a:rPr>
-              <a:t>Five independent tests confirm. Reported plainly,</a:t>
-            </a:r>
-          </a:p>
-          <a:p>
-            <a:pPr algn="l"/>
-            <a:r>
-              <a:rPr sz="1150" b="0">
-                <a:solidFill>
-                  <a:srgbClr val="334455"/>
-                </a:solidFill>
-                <a:latin typeface="Calibri"/>
-              </a:rPr>
-              <a:t>not dressed up.</a:t>
-            </a:r>
-          </a:p>
-        </p:txBody>
-      </p:sp>
-      <p:sp>
-        <p:nvSpPr>
-          <p:cNvPr id="19" name="Rectangle 18"/>
+              <a:t>tests confirm. Reported plainly, not dressed up.</a:t>
+            </a:r>
+          </a:p>
+        </p:txBody>
+      </p:sp>
+      <p:sp>
+        <p:nvSpPr>
+          <p:cNvPr id="21" name="Rectangle 20"/>
           <p:cNvSpPr/>
           <p:nvPr/>
         </p:nvSpPr>
         <p:spPr>
           <a:xfrm>
-            <a:off x="8595360" y="5212080"/>
+            <a:off x="8595360" y="5166360"/>
             <a:ext cx="3703320" cy="45720"/>
           </a:xfrm>
           <a:prstGeom prst="rect">
@@ -4137,13 +4207,13 @@
       </p:sp>
       <p:sp>
         <p:nvSpPr>
-          <p:cNvPr id="20" name="TextBox 19"/>
+          <p:cNvPr id="22" name="TextBox 21"/>
           <p:cNvSpPr txBox="1"/>
           <p:nvPr/>
         </p:nvSpPr>
         <p:spPr>
           <a:xfrm>
-            <a:off x="8595360" y="5321808"/>
+            <a:off x="8595360" y="5276088"/>
             <a:ext cx="3703320" cy="365760"/>
           </a:xfrm>
           <a:prstGeom prst="rect">
@@ -4184,7 +4254,7 @@
       </p:sp>
       <p:sp>
         <p:nvSpPr>
-          <p:cNvPr id="21" name="Rectangle 20"/>
+          <p:cNvPr id="23" name="Rectangle 22"/>
           <p:cNvSpPr/>
           <p:nvPr/>
         </p:nvSpPr>
@@ -4228,7 +4298,7 @@
       </p:sp>
       <p:sp>
         <p:nvSpPr>
-          <p:cNvPr id="22" name="TextBox 21"/>
+          <p:cNvPr id="24" name="TextBox 23"/>
           <p:cNvSpPr txBox="1"/>
           <p:nvPr/>
         </p:nvSpPr>
@@ -4263,7 +4333,7 @@
       </p:sp>
       <p:sp>
         <p:nvSpPr>
-          <p:cNvPr id="23" name="TextBox 22"/>
+          <p:cNvPr id="25" name="TextBox 24"/>
           <p:cNvSpPr txBox="1"/>
           <p:nvPr/>
         </p:nvSpPr>
@@ -4298,7 +4368,7 @@
       </p:sp>
       <p:sp>
         <p:nvSpPr>
-          <p:cNvPr id="24" name="TextBox 23"/>
+          <p:cNvPr id="26" name="TextBox 25"/>
           <p:cNvSpPr txBox="1"/>
           <p:nvPr/>
         </p:nvSpPr>

--- a/docs/demo/Sabercast_Pitch_Slide.pptx
+++ b/docs/demo/Sabercast_Pitch_Slide.pptx
@@ -3090,90 +3090,20 @@
       <p:grpSpPr/>
       <p:sp>
         <p:nvSpPr>
-          <p:cNvPr id="2" name="TextBox 1"/>
-          <p:cNvSpPr txBox="1"/>
-          <p:nvPr/>
-        </p:nvSpPr>
-        <p:spPr>
-          <a:xfrm>
-            <a:off x="457200" y="320040"/>
-            <a:ext cx="11430000" cy="594360"/>
-          </a:xfrm>
-          <a:prstGeom prst="rect">
-            <a:avLst/>
-          </a:prstGeom>
-          <a:noFill/>
-        </p:spPr>
-        <p:txBody>
-          <a:bodyPr wrap="square" lIns="45720" rIns="45720" tIns="18288" bIns="18288">
-            <a:spAutoFit/>
-          </a:bodyPr>
-          <a:lstStyle/>
-          <a:p>
-            <a:pPr algn="l"/>
-            <a:r>
-              <a:rPr sz="4200" b="1">
-                <a:solidFill>
-                  <a:srgbClr val="102A55"/>
-                </a:solidFill>
-                <a:latin typeface="Calibri"/>
-              </a:rPr>
-              <a:t>Sabercast</a:t>
-            </a:r>
-          </a:p>
-        </p:txBody>
-      </p:sp>
-      <p:sp>
-        <p:nvSpPr>
-          <p:cNvPr id="3" name="TextBox 2"/>
-          <p:cNvSpPr txBox="1"/>
-          <p:nvPr/>
-        </p:nvSpPr>
-        <p:spPr>
-          <a:xfrm>
-            <a:off x="457200" y="914400"/>
-            <a:ext cx="11430000" cy="457200"/>
-          </a:xfrm>
-          <a:prstGeom prst="rect">
-            <a:avLst/>
-          </a:prstGeom>
-          <a:noFill/>
-        </p:spPr>
-        <p:txBody>
-          <a:bodyPr wrap="square" lIns="45720" rIns="45720" tIns="18288" bIns="18288">
-            <a:spAutoFit/>
-          </a:bodyPr>
-          <a:lstStyle/>
-          <a:p>
-            <a:pPr algn="l"/>
-            <a:r>
-              <a:rPr sz="1400" b="0">
-                <a:solidFill>
-                  <a:srgbClr val="334455"/>
-                </a:solidFill>
-                <a:latin typeface="Calibri"/>
-              </a:rPr>
-              <a:t>LLM-powered MLB front-office intelligence — built for small / mid-market clubs that need analyst leverage without a 20-person R&amp;D shop.</a:t>
-            </a:r>
-          </a:p>
-        </p:txBody>
-      </p:sp>
-      <p:sp>
-        <p:nvSpPr>
-          <p:cNvPr id="4" name="Rectangle 3"/>
+          <p:cNvPr id="2" name="Rectangle 1"/>
           <p:cNvSpPr/>
           <p:nvPr/>
         </p:nvSpPr>
         <p:spPr>
           <a:xfrm>
-            <a:off x="457200" y="1508760"/>
-            <a:ext cx="11277295" cy="22860"/>
+            <a:off x="0" y="0"/>
+            <a:ext cx="12191695" cy="6858000"/>
           </a:xfrm>
           <a:prstGeom prst="rect">
             <a:avLst/>
           </a:prstGeom>
           <a:solidFill>
-            <a:srgbClr val="3A82CD"/>
+            <a:srgbClr val="FAFBFC"/>
           </a:solidFill>
           <a:ln>
             <a:noFill/>
@@ -3202,16 +3132,169 @@
           </a:p>
         </p:txBody>
       </p:sp>
-      <p:sp>
-        <p:nvSpPr>
-          <p:cNvPr id="5" name="Rectangle 4"/>
+      <p:pic>
+        <p:nvPicPr>
+          <p:cNvPr id="3" name="Picture 2" descr="baseball_diamond.png"/>
+          <p:cNvPicPr>
+            <a:picLocks noChangeAspect="1"/>
+          </p:cNvPicPr>
+          <p:nvPr/>
+        </p:nvPicPr>
+        <p:blipFill>
+          <a:blip r:embed="rId2"/>
+          <a:stretch>
+            <a:fillRect/>
+          </a:stretch>
+        </p:blipFill>
+        <p:spPr>
+          <a:xfrm>
+            <a:off x="9144000" y="208025"/>
+            <a:ext cx="2834640" cy="2692908"/>
+          </a:xfrm>
+          <a:prstGeom prst="rect">
+            <a:avLst/>
+          </a:prstGeom>
+        </p:spPr>
+      </p:pic>
+      <p:pic>
+        <p:nvPicPr>
+          <p:cNvPr id="4" name="Picture 3" descr="seam_strand.png"/>
+          <p:cNvPicPr>
+            <a:picLocks noChangeAspect="1"/>
+          </p:cNvPicPr>
+          <p:nvPr/>
+        </p:nvPicPr>
+        <p:blipFill>
+          <a:blip r:embed="rId3"/>
+          <a:stretch>
+            <a:fillRect/>
+          </a:stretch>
+        </p:blipFill>
+        <p:spPr>
+          <a:xfrm>
+            <a:off x="91440" y="182880"/>
+            <a:ext cx="365760" cy="6492240"/>
+          </a:xfrm>
+          <a:prstGeom prst="rect">
+            <a:avLst/>
+          </a:prstGeom>
+        </p:spPr>
+      </p:pic>
+      <p:sp>
+        <p:nvSpPr>
+          <p:cNvPr id="5" name="TextBox 4"/>
+          <p:cNvSpPr txBox="1"/>
+          <p:nvPr/>
+        </p:nvSpPr>
+        <p:spPr>
+          <a:xfrm>
+            <a:off x="685800" y="274320"/>
+            <a:ext cx="8229600" cy="777240"/>
+          </a:xfrm>
+          <a:prstGeom prst="rect">
+            <a:avLst/>
+          </a:prstGeom>
+          <a:noFill/>
+        </p:spPr>
+        <p:txBody>
+          <a:bodyPr wrap="square" lIns="36576" rIns="36576" tIns="18288" bIns="18288">
+            <a:spAutoFit/>
+          </a:bodyPr>
+          <a:lstStyle/>
+          <a:p>
+            <a:pPr algn="l"/>
+            <a:r>
+              <a:rPr sz="4200" b="1" i="0">
+                <a:solidFill>
+                  <a:srgbClr val="102A55"/>
+                </a:solidFill>
+                <a:latin typeface="Calibri"/>
+              </a:rPr>
+              <a:t>Sabercast</a:t>
+            </a:r>
+          </a:p>
+        </p:txBody>
+      </p:sp>
+      <p:sp>
+        <p:nvSpPr>
+          <p:cNvPr id="6" name="TextBox 5"/>
+          <p:cNvSpPr txBox="1"/>
+          <p:nvPr/>
+        </p:nvSpPr>
+        <p:spPr>
+          <a:xfrm>
+            <a:off x="685800" y="1005840"/>
+            <a:ext cx="8229600" cy="320040"/>
+          </a:xfrm>
+          <a:prstGeom prst="rect">
+            <a:avLst/>
+          </a:prstGeom>
+          <a:noFill/>
+        </p:spPr>
+        <p:txBody>
+          <a:bodyPr wrap="square" lIns="36576" rIns="36576" tIns="18288" bIns="18288">
+            <a:spAutoFit/>
+          </a:bodyPr>
+          <a:lstStyle/>
+          <a:p>
+            <a:pPr algn="l"/>
+            <a:r>
+              <a:rPr sz="1500" b="1" i="0">
+                <a:solidFill>
+                  <a:srgbClr val="334455"/>
+                </a:solidFill>
+                <a:latin typeface="Calibri"/>
+              </a:rPr>
+              <a:t>LLM-powered MLB front-office intelligence</a:t>
+            </a:r>
+          </a:p>
+        </p:txBody>
+      </p:sp>
+      <p:sp>
+        <p:nvSpPr>
+          <p:cNvPr id="7" name="TextBox 6"/>
+          <p:cNvSpPr txBox="1"/>
+          <p:nvPr/>
+        </p:nvSpPr>
+        <p:spPr>
+          <a:xfrm>
+            <a:off x="685800" y="1298448"/>
+            <a:ext cx="10058400" cy="320040"/>
+          </a:xfrm>
+          <a:prstGeom prst="rect">
+            <a:avLst/>
+          </a:prstGeom>
+          <a:noFill/>
+        </p:spPr>
+        <p:txBody>
+          <a:bodyPr wrap="square" lIns="36576" rIns="36576" tIns="18288" bIns="18288">
+            <a:spAutoFit/>
+          </a:bodyPr>
+          <a:lstStyle/>
+          <a:p>
+            <a:pPr algn="l"/>
+            <a:r>
+              <a:rPr sz="1150" b="0" i="1">
+                <a:solidFill>
+                  <a:srgbClr val="667080"/>
+                </a:solidFill>
+                <a:latin typeface="Calibri"/>
+              </a:rPr>
+              <a:t>Built for small / mid-market clubs that need analyst leverage without a 20-person R&amp;D shop.</a:t>
+            </a:r>
+          </a:p>
+        </p:txBody>
+      </p:sp>
+      <p:sp>
+        <p:nvSpPr>
+          <p:cNvPr id="8" name="Rectangle 7"/>
           <p:cNvSpPr/>
           <p:nvPr/>
         </p:nvSpPr>
         <p:spPr>
           <a:xfrm>
-            <a:off x="457200" y="1783080"/>
-            <a:ext cx="3703320" cy="54864"/>
+            <a:off x="685800" y="1627632"/>
+            <a:ext cx="10835640" cy="22860"/>
           </a:xfrm>
           <a:prstGeom prst="rect">
             <a:avLst/>
@@ -3248,225 +3331,27 @@
       </p:sp>
       <p:sp>
         <p:nvSpPr>
-          <p:cNvPr id="6" name="TextBox 5"/>
-          <p:cNvSpPr txBox="1"/>
-          <p:nvPr/>
-        </p:nvSpPr>
-        <p:spPr>
-          <a:xfrm>
-            <a:off x="457200" y="1856231"/>
-            <a:ext cx="3703320" cy="274320"/>
-          </a:xfrm>
-          <a:prstGeom prst="rect">
-            <a:avLst/>
-          </a:prstGeom>
-          <a:noFill/>
-        </p:spPr>
-        <p:txBody>
-          <a:bodyPr wrap="square" lIns="45720" rIns="45720" tIns="18288" bIns="18288">
-            <a:spAutoFit/>
-          </a:bodyPr>
-          <a:lstStyle/>
-          <a:p>
-            <a:pPr algn="l"/>
-            <a:r>
-              <a:rPr sz="1100" b="1">
-                <a:solidFill>
-                  <a:srgbClr val="3A82CD"/>
-                </a:solidFill>
-                <a:latin typeface="Calibri"/>
-              </a:rPr>
-              <a:t>WHAT — three front-office workflows</a:t>
-            </a:r>
-          </a:p>
-        </p:txBody>
-      </p:sp>
-      <p:sp>
-        <p:nvSpPr>
-          <p:cNvPr id="7" name="TextBox 6"/>
-          <p:cNvSpPr txBox="1"/>
-          <p:nvPr/>
-        </p:nvSpPr>
-        <p:spPr>
-          <a:xfrm>
-            <a:off x="457200" y="2286000"/>
-            <a:ext cx="3703320" cy="3429000"/>
-          </a:xfrm>
-          <a:prstGeom prst="rect">
-            <a:avLst/>
-          </a:prstGeom>
-          <a:noFill/>
-        </p:spPr>
-        <p:txBody>
-          <a:bodyPr wrap="square" lIns="45720" rIns="45720" tIns="18288" bIns="18288">
-            <a:spAutoFit/>
-          </a:bodyPr>
-          <a:lstStyle/>
-          <a:p>
-            <a:pPr algn="l"/>
-            <a:r>
-              <a:rPr sz="1200" b="0">
-                <a:solidFill>
-                  <a:srgbClr val="334455"/>
-                </a:solidFill>
-                <a:latin typeface="Calibri"/>
-              </a:rPr>
-              <a:t>1.  Roster Builder</a:t>
-            </a:r>
-          </a:p>
-          <a:p>
-            <a:pPr algn="l"/>
-            <a:r>
-              <a:rPr sz="1200" b="0">
-                <a:solidFill>
-                  <a:srgbClr val="334455"/>
-                </a:solidFill>
-                <a:latin typeface="Calibri"/>
-              </a:rPr>
-              <a:t>     Day-to-day lineup construction vs. a chosen opponent.</a:t>
-            </a:r>
-          </a:p>
-          <a:p>
-            <a:pPr algn="l"/>
-            <a:r>
-              <a:rPr sz="1200" b="0">
-                <a:solidFill>
-                  <a:srgbClr val="334455"/>
-                </a:solidFill>
-                <a:latin typeface="Calibri"/>
-              </a:rPr>
-              <a:t>     One gpt-4o call → 9-slot lineup + matchup notes.</a:t>
-            </a:r>
-          </a:p>
-          <a:p>
-            <a:pPr algn="l"/>
-            <a:r>
-              <a:rPr sz="1200" b="0">
-                <a:solidFill>
-                  <a:srgbClr val="334455"/>
-                </a:solidFill>
-                <a:latin typeface="Calibri"/>
-              </a:rPr>
-              <a:t/>
-            </a:r>
-          </a:p>
-          <a:p>
-            <a:pPr algn="l"/>
-            <a:r>
-              <a:rPr sz="1200" b="0">
-                <a:solidFill>
-                  <a:srgbClr val="334455"/>
-                </a:solidFill>
-                <a:latin typeface="Calibri"/>
-              </a:rPr>
-              <a:t>2.  Opponent Scouting</a:t>
-            </a:r>
-          </a:p>
-          <a:p>
-            <a:pPr algn="l"/>
-            <a:r>
-              <a:rPr sz="1200" b="0">
-                <a:solidFill>
-                  <a:srgbClr val="334455"/>
-                </a:solidFill>
-                <a:latin typeface="Calibri"/>
-              </a:rPr>
-              <a:t>     Narrative summary + top-3 threats + exploitable</a:t>
-            </a:r>
-          </a:p>
-          <a:p>
-            <a:pPr algn="l"/>
-            <a:r>
-              <a:rPr sz="1200" b="0">
-                <a:solidFill>
-                  <a:srgbClr val="334455"/>
-                </a:solidFill>
-                <a:latin typeface="Calibri"/>
-              </a:rPr>
-              <a:t>     weaknesses + pitching/hitting strategy.</a:t>
-            </a:r>
-          </a:p>
-          <a:p>
-            <a:pPr algn="l"/>
-            <a:r>
-              <a:rPr sz="1200" b="0">
-                <a:solidFill>
-                  <a:srgbClr val="334455"/>
-                </a:solidFill>
-                <a:latin typeface="Calibri"/>
-              </a:rPr>
-              <a:t/>
-            </a:r>
-          </a:p>
-          <a:p>
-            <a:pPr algn="l"/>
-            <a:r>
-              <a:rPr sz="1200" b="0">
-                <a:solidFill>
-                  <a:srgbClr val="334455"/>
-                </a:solidFill>
-                <a:latin typeface="Calibri"/>
-              </a:rPr>
-              <a:t>3.  Gap Filler</a:t>
-            </a:r>
-          </a:p>
-          <a:p>
-            <a:pPr algn="l"/>
-            <a:r>
-              <a:rPr sz="1200" b="0">
-                <a:solidFill>
-                  <a:srgbClr val="334455"/>
-                </a:solidFill>
-                <a:latin typeface="Calibri"/>
-              </a:rPr>
-              <a:t>     Top-3 roster gaps + position-matched candidate targets</a:t>
-            </a:r>
-          </a:p>
-          <a:p>
-            <a:pPr algn="l"/>
-            <a:r>
-              <a:rPr sz="1200" b="0">
-                <a:solidFill>
-                  <a:srgbClr val="334455"/>
-                </a:solidFill>
-                <a:latin typeface="Calibri"/>
-              </a:rPr>
-              <a:t>     from a ChromaDB vectorstore + contract-cost forecasts.</a:t>
-            </a:r>
-          </a:p>
-          <a:p>
-            <a:pPr algn="l"/>
-            <a:r>
-              <a:rPr sz="1200" b="0">
-                <a:solidFill>
-                  <a:srgbClr val="334455"/>
-                </a:solidFill>
-                <a:latin typeface="Calibri"/>
-              </a:rPr>
-              <a:t>     12 LLM calls running in parallel, ~13s end-to-end.</a:t>
-            </a:r>
-          </a:p>
-        </p:txBody>
-      </p:sp>
-      <p:sp>
-        <p:nvSpPr>
-          <p:cNvPr id="8" name="Rectangle 7"/>
+          <p:cNvPr id="9" name="Rounded Rectangle 8"/>
           <p:cNvSpPr/>
           <p:nvPr/>
         </p:nvSpPr>
         <p:spPr>
           <a:xfrm>
-            <a:off x="4526280" y="1783080"/>
-            <a:ext cx="3703320" cy="54864"/>
-          </a:xfrm>
-          <a:prstGeom prst="rect">
-            <a:avLst/>
+            <a:off x="685800" y="1783080"/>
+            <a:ext cx="2571750" cy="1051560"/>
+          </a:xfrm>
+          <a:prstGeom prst="roundRect">
+            <a:avLst>
+              <a:gd name="adj" fmla="val 10000"/>
+            </a:avLst>
           </a:prstGeom>
           <a:solidFill>
-            <a:srgbClr val="3A82CD"/>
+            <a:srgbClr val="E8F4EA"/>
           </a:solidFill>
-          <a:ln>
-            <a:noFill/>
+          <a:ln w="9525">
+            <a:solidFill>
+              <a:srgbClr val="2E863E"/>
+            </a:solidFill>
           </a:ln>
           <a:effectLst/>
         </p:spPr>
@@ -3494,14 +3379,14 @@
       </p:sp>
       <p:sp>
         <p:nvSpPr>
-          <p:cNvPr id="9" name="TextBox 8"/>
+          <p:cNvPr id="10" name="TextBox 9"/>
           <p:cNvSpPr txBox="1"/>
           <p:nvPr/>
         </p:nvSpPr>
         <p:spPr>
           <a:xfrm>
-            <a:off x="4526280" y="1856231"/>
-            <a:ext cx="3703320" cy="274320"/>
+            <a:off x="685800" y="1874519"/>
+            <a:ext cx="2571750" cy="502920"/>
           </a:xfrm>
           <a:prstGeom prst="rect">
             <a:avLst/>
@@ -3509,34 +3394,34 @@
           <a:noFill/>
         </p:spPr>
         <p:txBody>
-          <a:bodyPr wrap="square" lIns="45720" rIns="45720" tIns="18288" bIns="18288">
+          <a:bodyPr wrap="square" lIns="36576" rIns="36576" tIns="18288" bIns="18288">
             <a:spAutoFit/>
           </a:bodyPr>
           <a:lstStyle/>
           <a:p>
-            <a:pPr algn="l"/>
-            <a:r>
-              <a:rPr sz="1100" b="1">
-                <a:solidFill>
-                  <a:srgbClr val="3A82CD"/>
+            <a:pPr algn="ctr"/>
+            <a:r>
+              <a:rPr sz="2800" b="1" i="0">
+                <a:solidFill>
+                  <a:srgbClr val="2E863E"/>
                 </a:solidFill>
                 <a:latin typeface="Calibri"/>
               </a:rPr>
-              <a:t>HOW — architecture</a:t>
-            </a:r>
-          </a:p>
-        </p:txBody>
-      </p:sp>
-      <p:sp>
-        <p:nvSpPr>
-          <p:cNvPr id="10" name="TextBox 9"/>
+              <a:t>+70pp</a:t>
+            </a:r>
+          </a:p>
+        </p:txBody>
+      </p:sp>
+      <p:sp>
+        <p:nvSpPr>
+          <p:cNvPr id="11" name="TextBox 10"/>
           <p:cNvSpPr txBox="1"/>
           <p:nvPr/>
         </p:nvSpPr>
         <p:spPr>
           <a:xfrm>
-            <a:off x="4526280" y="2286000"/>
-            <a:ext cx="3703320" cy="3429000"/>
+            <a:off x="685800" y="2386584"/>
+            <a:ext cx="2571750" cy="228600"/>
           </a:xfrm>
           <a:prstGeom prst="rect">
             <a:avLst/>
@@ -3544,223 +3429,82 @@
           <a:noFill/>
         </p:spPr>
         <p:txBody>
-          <a:bodyPr wrap="square" lIns="45720" rIns="45720" tIns="18288" bIns="18288">
+          <a:bodyPr wrap="square" lIns="36576" rIns="36576" tIns="18288" bIns="18288">
             <a:spAutoFit/>
           </a:bodyPr>
           <a:lstStyle/>
           <a:p>
-            <a:pPr algn="l"/>
-            <a:r>
-              <a:rPr sz="1100" b="0">
+            <a:pPr algn="ctr"/>
+            <a:r>
+              <a:rPr sz="1000" b="1" i="0">
                 <a:solidFill>
                   <a:srgbClr val="334455"/>
                 </a:solidFill>
                 <a:latin typeface="Calibri"/>
               </a:rPr>
-              <a:t>Data ingest</a:t>
-            </a:r>
-          </a:p>
-          <a:p>
-            <a:pPr algn="l"/>
-            <a:r>
-              <a:rPr sz="1100" b="0">
-                <a:solidFill>
-                  <a:srgbClr val="334455"/>
-                </a:solidFill>
-                <a:latin typeface="Calibri"/>
-              </a:rPr>
-              <a:t>    pybaseball · Spotrac · Statcast OAA + pop time</a:t>
-            </a:r>
-          </a:p>
-          <a:p>
-            <a:pPr algn="l"/>
-            <a:r>
-              <a:rPr sz="1100" b="0">
-                <a:solidFill>
-                  <a:srgbClr val="334455"/>
-                </a:solidFill>
-                <a:latin typeface="Calibri"/>
-              </a:rPr>
-              <a:t/>
-            </a:r>
-          </a:p>
-          <a:p>
-            <a:pPr algn="l"/>
-            <a:r>
-              <a:rPr sz="1100" b="0">
-                <a:solidFill>
-                  <a:srgbClr val="334455"/>
-                </a:solidFill>
-                <a:latin typeface="Calibri"/>
-              </a:rPr>
-              <a:t>LLM routing (cost-disciplined)</a:t>
-            </a:r>
-          </a:p>
-          <a:p>
-            <a:pPr algn="l"/>
-            <a:r>
-              <a:rPr sz="1100" b="0">
-                <a:solidFill>
-                  <a:srgbClr val="334455"/>
-                </a:solidFill>
-                <a:latin typeface="Calibri"/>
-              </a:rPr>
-              <a:t>    gpt-4o            — narrative reasoning</a:t>
-            </a:r>
-          </a:p>
-          <a:p>
-            <a:pPr algn="l"/>
-            <a:r>
-              <a:rPr sz="1100" b="0">
-                <a:solidFill>
-                  <a:srgbClr val="334455"/>
-                </a:solidFill>
-                <a:latin typeface="Calibri"/>
-              </a:rPr>
-              <a:t>    gpt-4o-mini       — structured JSON output</a:t>
-            </a:r>
-          </a:p>
-          <a:p>
-            <a:pPr algn="l"/>
-            <a:r>
-              <a:rPr sz="1100" b="0">
-                <a:solidFill>
-                  <a:srgbClr val="334455"/>
-                </a:solidFill>
-                <a:latin typeface="Calibri"/>
-              </a:rPr>
-              <a:t>    text-embedding-3-small — RAG retrieval</a:t>
-            </a:r>
-          </a:p>
-          <a:p>
-            <a:pPr algn="l"/>
-            <a:r>
-              <a:rPr sz="1100" b="0">
-                <a:solidFill>
-                  <a:srgbClr val="334455"/>
-                </a:solidFill>
-                <a:latin typeface="Calibri"/>
-              </a:rPr>
-              <a:t>    Qwen 2.5 7B + LoRA  — fine-tune (eval only)</a:t>
-            </a:r>
-          </a:p>
-          <a:p>
-            <a:pPr algn="l"/>
-            <a:r>
-              <a:rPr sz="1100" b="0">
-                <a:solidFill>
-                  <a:srgbClr val="334455"/>
-                </a:solidFill>
-                <a:latin typeface="Calibri"/>
-              </a:rPr>
-              <a:t/>
-            </a:r>
-          </a:p>
-          <a:p>
-            <a:pPr algn="l"/>
-            <a:r>
-              <a:rPr sz="1100" b="0">
-                <a:solidFill>
-                  <a:srgbClr val="334455"/>
-                </a:solidFill>
-                <a:latin typeface="Calibri"/>
-              </a:rPr>
-              <a:t>Storage</a:t>
-            </a:r>
-          </a:p>
-          <a:p>
-            <a:pPr algn="l"/>
-            <a:r>
-              <a:rPr sz="1100" b="0">
-                <a:solidFill>
-                  <a:srgbClr val="334455"/>
-                </a:solidFill>
-                <a:latin typeface="Calibri"/>
-              </a:rPr>
-              <a:t>    ChromaDB persistent — 999 player profiles + 15 glossary entries</a:t>
-            </a:r>
-          </a:p>
-          <a:p>
-            <a:pPr algn="l"/>
-            <a:r>
-              <a:rPr sz="1100" b="0">
-                <a:solidFill>
-                  <a:srgbClr val="334455"/>
-                </a:solidFill>
-                <a:latin typeface="Calibri"/>
-              </a:rPr>
-              <a:t>    1,254 contracts, no-look-ahead at every retrieval point</a:t>
-            </a:r>
-          </a:p>
-          <a:p>
-            <a:pPr algn="l"/>
-            <a:r>
-              <a:rPr sz="1100" b="0">
-                <a:solidFill>
-                  <a:srgbClr val="334455"/>
-                </a:solidFill>
-                <a:latin typeface="Calibri"/>
-              </a:rPr>
-              <a:t/>
-            </a:r>
-          </a:p>
-          <a:p>
-            <a:pPr algn="l"/>
-            <a:r>
-              <a:rPr sz="1100" b="0">
-                <a:solidFill>
-                  <a:srgbClr val="334455"/>
-                </a:solidFill>
-                <a:latin typeface="Calibri"/>
-              </a:rPr>
-              <a:t>Build economics</a:t>
-            </a:r>
-          </a:p>
-          <a:p>
-            <a:pPr algn="l"/>
-            <a:r>
-              <a:rPr sz="1100" b="0">
-                <a:solidFill>
-                  <a:srgbClr val="334455"/>
-                </a:solidFill>
-                <a:latin typeface="Calibri"/>
-              </a:rPr>
-              <a:t>    9-day end-to-end build · ~$47 total platform spend</a:t>
-            </a:r>
-          </a:p>
-          <a:p>
-            <a:pPr algn="l"/>
-            <a:r>
-              <a:rPr sz="1100" b="0">
-                <a:solidFill>
-                  <a:srgbClr val="334455"/>
-                </a:solidFill>
-                <a:latin typeface="Calibri"/>
-              </a:rPr>
-              <a:t>    Three vendor constraints absorbed mid-build</a:t>
-            </a:r>
-          </a:p>
-        </p:txBody>
-      </p:sp>
-      <p:sp>
-        <p:nvSpPr>
-          <p:cNvPr id="11" name="Rectangle 10"/>
-          <p:cNvSpPr/>
+              <a:t>RAG accuracy lift</a:t>
+            </a:r>
+          </a:p>
+        </p:txBody>
+      </p:sp>
+      <p:sp>
+        <p:nvSpPr>
+          <p:cNvPr id="12" name="TextBox 11"/>
+          <p:cNvSpPr txBox="1"/>
           <p:nvPr/>
         </p:nvSpPr>
         <p:spPr>
           <a:xfrm>
-            <a:off x="8595360" y="1783080"/>
-            <a:ext cx="3703320" cy="54864"/>
+            <a:off x="685800" y="2587752"/>
+            <a:ext cx="2571750" cy="201168"/>
           </a:xfrm>
           <a:prstGeom prst="rect">
             <a:avLst/>
           </a:prstGeom>
+          <a:noFill/>
+        </p:spPr>
+        <p:txBody>
+          <a:bodyPr wrap="square" lIns="36576" rIns="36576" tIns="18288" bIns="18288">
+            <a:spAutoFit/>
+          </a:bodyPr>
+          <a:lstStyle/>
+          <a:p>
+            <a:pPr algn="ctr"/>
+            <a:r>
+              <a:rPr sz="850" b="0" i="1">
+                <a:solidFill>
+                  <a:srgbClr val="667080"/>
+                </a:solidFill>
+                <a:latin typeface="Calibri"/>
+              </a:rPr>
+              <a:t>20 Qs · McNemar p=0.0005</a:t>
+            </a:r>
+          </a:p>
+        </p:txBody>
+      </p:sp>
+      <p:sp>
+        <p:nvSpPr>
+          <p:cNvPr id="13" name="Rounded Rectangle 12"/>
+          <p:cNvSpPr/>
+          <p:nvPr/>
+        </p:nvSpPr>
+        <p:spPr>
+          <a:xfrm>
+            <a:off x="3440430" y="1783080"/>
+            <a:ext cx="2571750" cy="1051560"/>
+          </a:xfrm>
+          <a:prstGeom prst="roundRect">
+            <a:avLst>
+              <a:gd name="adj" fmla="val 10000"/>
+            </a:avLst>
+          </a:prstGeom>
           <a:solidFill>
-            <a:srgbClr val="3A82CD"/>
+            <a:srgbClr val="E8F4EA"/>
           </a:solidFill>
-          <a:ln>
-            <a:noFill/>
+          <a:ln w="9525">
+            <a:solidFill>
+              <a:srgbClr val="2E863E"/>
+            </a:solidFill>
           </a:ln>
           <a:effectLst/>
         </p:spPr>
@@ -3788,14 +3532,14 @@
       </p:sp>
       <p:sp>
         <p:nvSpPr>
-          <p:cNvPr id="12" name="TextBox 11"/>
+          <p:cNvPr id="14" name="TextBox 13"/>
           <p:cNvSpPr txBox="1"/>
           <p:nvPr/>
         </p:nvSpPr>
         <p:spPr>
           <a:xfrm>
-            <a:off x="8595360" y="1856231"/>
-            <a:ext cx="3703320" cy="274320"/>
+            <a:off x="3440430" y="1874519"/>
+            <a:ext cx="2571750" cy="502920"/>
           </a:xfrm>
           <a:prstGeom prst="rect">
             <a:avLst/>
@@ -3803,34 +3547,34 @@
           <a:noFill/>
         </p:spPr>
         <p:txBody>
-          <a:bodyPr wrap="square" lIns="45720" rIns="45720" tIns="18288" bIns="18288">
+          <a:bodyPr wrap="square" lIns="36576" rIns="36576" tIns="18288" bIns="18288">
             <a:spAutoFit/>
           </a:bodyPr>
           <a:lstStyle/>
           <a:p>
-            <a:pPr algn="l"/>
-            <a:r>
-              <a:rPr sz="1100" b="1">
-                <a:solidFill>
-                  <a:srgbClr val="3A82CD"/>
+            <a:pPr algn="ctr"/>
+            <a:r>
+              <a:rPr sz="2800" b="1" i="0">
+                <a:solidFill>
+                  <a:srgbClr val="2E863E"/>
                 </a:solidFill>
                 <a:latin typeface="Calibri"/>
               </a:rPr>
-              <a:t>RESULTS — 10 pre-registered tests, 4 significant</a:t>
-            </a:r>
-          </a:p>
-        </p:txBody>
-      </p:sp>
-      <p:sp>
-        <p:nvSpPr>
-          <p:cNvPr id="13" name="TextBox 12"/>
+              <a:t>3.1×</a:t>
+            </a:r>
+          </a:p>
+        </p:txBody>
+      </p:sp>
+      <p:sp>
+        <p:nvSpPr>
+          <p:cNvPr id="15" name="TextBox 14"/>
           <p:cNvSpPr txBox="1"/>
           <p:nvPr/>
         </p:nvSpPr>
         <p:spPr>
           <a:xfrm>
-            <a:off x="8595360" y="2240280"/>
-            <a:ext cx="3703320" cy="256032"/>
+            <a:off x="3440430" y="2386584"/>
+            <a:ext cx="2571750" cy="228600"/>
           </a:xfrm>
           <a:prstGeom prst="rect">
             <a:avLst/>
@@ -3838,34 +3582,34 @@
           <a:noFill/>
         </p:spPr>
         <p:txBody>
-          <a:bodyPr wrap="square" lIns="45720" rIns="45720" tIns="18288" bIns="18288">
+          <a:bodyPr wrap="square" lIns="36576" rIns="36576" tIns="18288" bIns="18288">
             <a:spAutoFit/>
           </a:bodyPr>
           <a:lstStyle/>
           <a:p>
-            <a:pPr algn="l"/>
-            <a:r>
-              <a:rPr sz="1150" b="1">
-                <a:solidFill>
-                  <a:srgbClr val="2E863E"/>
+            <a:pPr algn="ctr"/>
+            <a:r>
+              <a:rPr sz="1000" b="1" i="0">
+                <a:solidFill>
+                  <a:srgbClr val="334455"/>
                 </a:solidFill>
                 <a:latin typeface="Calibri"/>
               </a:rPr>
-              <a:t>RAG accuracy delta</a:t>
-            </a:r>
-          </a:p>
-        </p:txBody>
-      </p:sp>
-      <p:sp>
-        <p:nvSpPr>
-          <p:cNvPr id="14" name="TextBox 13"/>
+              <a:t>Precision@10 vs random</a:t>
+            </a:r>
+          </a:p>
+        </p:txBody>
+      </p:sp>
+      <p:sp>
+        <p:nvSpPr>
+          <p:cNvPr id="16" name="TextBox 15"/>
           <p:cNvSpPr txBox="1"/>
           <p:nvPr/>
         </p:nvSpPr>
         <p:spPr>
           <a:xfrm>
-            <a:off x="8595360" y="2468880"/>
-            <a:ext cx="3703320" cy="365760"/>
+            <a:off x="3440430" y="2587752"/>
+            <a:ext cx="2571750" cy="201168"/>
           </a:xfrm>
           <a:prstGeom prst="rect">
             <a:avLst/>
@@ -3873,313 +3617,47 @@
           <a:noFill/>
         </p:spPr>
         <p:txBody>
-          <a:bodyPr wrap="square" lIns="45720" rIns="45720" tIns="18288" bIns="18288">
+          <a:bodyPr wrap="square" lIns="36576" rIns="36576" tIns="18288" bIns="18288">
             <a:spAutoFit/>
           </a:bodyPr>
           <a:lstStyle/>
           <a:p>
-            <a:pPr algn="l"/>
-            <a:r>
-              <a:rPr sz="1050" b="0">
-                <a:solidFill>
-                  <a:srgbClr val="334455"/>
+            <a:pPr algn="ctr"/>
+            <a:r>
+              <a:rPr sz="850" b="0" i="1">
+                <a:solidFill>
+                  <a:srgbClr val="667080"/>
                 </a:solidFill>
                 <a:latin typeface="Calibri"/>
               </a:rPr>
-              <a:t>+70 pp gain on 20 held-out questions</a:t>
-            </a:r>
-          </a:p>
-          <a:p>
-            <a:pPr algn="l"/>
-            <a:r>
-              <a:rPr sz="1050" b="0">
-                <a:solidFill>
-                  <a:srgbClr val="334455"/>
-                </a:solidFill>
-                <a:latin typeface="Calibri"/>
-              </a:rPr>
-              <a:t>McNemar p = 0.0005</a:t>
-            </a:r>
-          </a:p>
-        </p:txBody>
-      </p:sp>
-      <p:sp>
-        <p:nvSpPr>
-          <p:cNvPr id="15" name="TextBox 14"/>
-          <p:cNvSpPr txBox="1"/>
-          <p:nvPr/>
-        </p:nvSpPr>
-        <p:spPr>
-          <a:xfrm>
-            <a:off x="8595360" y="2926080"/>
-            <a:ext cx="3703320" cy="256032"/>
-          </a:xfrm>
-          <a:prstGeom prst="rect">
-            <a:avLst/>
-          </a:prstGeom>
-          <a:noFill/>
-        </p:spPr>
-        <p:txBody>
-          <a:bodyPr wrap="square" lIns="45720" rIns="45720" tIns="18288" bIns="18288">
-            <a:spAutoFit/>
-          </a:bodyPr>
-          <a:lstStyle/>
-          <a:p>
-            <a:pPr algn="l"/>
-            <a:r>
-              <a:rPr sz="1150" b="1">
-                <a:solidFill>
-                  <a:srgbClr val="2E863E"/>
-                </a:solidFill>
-                <a:latin typeface="Calibri"/>
-              </a:rPr>
-              <a:t>Player-matcher precision@10</a:t>
-            </a:r>
-          </a:p>
-        </p:txBody>
-      </p:sp>
-      <p:sp>
-        <p:nvSpPr>
-          <p:cNvPr id="16" name="TextBox 15"/>
-          <p:cNvSpPr txBox="1"/>
-          <p:nvPr/>
-        </p:nvSpPr>
-        <p:spPr>
-          <a:xfrm>
-            <a:off x="8595360" y="3154680"/>
-            <a:ext cx="3703320" cy="365760"/>
-          </a:xfrm>
-          <a:prstGeom prst="rect">
-            <a:avLst/>
-          </a:prstGeom>
-          <a:noFill/>
-        </p:spPr>
-        <p:txBody>
-          <a:bodyPr wrap="square" lIns="45720" rIns="45720" tIns="18288" bIns="18288">
-            <a:spAutoFit/>
-          </a:bodyPr>
-          <a:lstStyle/>
-          <a:p>
-            <a:pPr algn="l"/>
-            <a:r>
-              <a:rPr sz="1050" b="0">
-                <a:solidFill>
-                  <a:srgbClr val="334455"/>
-                </a:solidFill>
-                <a:latin typeface="Calibri"/>
-              </a:rPr>
-              <a:t>41.9% vs 13.3% random (3.1× lift, n=43)</a:t>
-            </a:r>
-          </a:p>
-          <a:p>
-            <a:pPr algn="l"/>
-            <a:r>
-              <a:rPr sz="1050" b="0">
-                <a:solidFill>
-                  <a:srgbClr val="334455"/>
-                </a:solidFill>
-                <a:latin typeface="Calibri"/>
-              </a:rPr>
-              <a:t>z = 5.66, p &lt; 0.0001 — top-K finds actual signings</a:t>
-            </a:r>
-          </a:p>
-        </p:txBody>
-      </p:sp>
-      <p:sp>
-        <p:nvSpPr>
-          <p:cNvPr id="17" name="TextBox 16"/>
-          <p:cNvSpPr txBox="1"/>
-          <p:nvPr/>
-        </p:nvSpPr>
-        <p:spPr>
-          <a:xfrm>
-            <a:off x="8595360" y="3611880"/>
-            <a:ext cx="3703320" cy="256032"/>
-          </a:xfrm>
-          <a:prstGeom prst="rect">
-            <a:avLst/>
-          </a:prstGeom>
-          <a:noFill/>
-        </p:spPr>
-        <p:txBody>
-          <a:bodyPr wrap="square" lIns="45720" rIns="45720" tIns="18288" bIns="18288">
-            <a:spAutoFit/>
-          </a:bodyPr>
-          <a:lstStyle/>
-          <a:p>
-            <a:pPr algn="l"/>
-            <a:r>
-              <a:rPr sz="1150" b="1">
-                <a:solidFill>
-                  <a:srgbClr val="2E863E"/>
-                </a:solidFill>
-                <a:latin typeface="Calibri"/>
-              </a:rPr>
-              <a:t>Position-level diagnostic</a:t>
-            </a:r>
-          </a:p>
-        </p:txBody>
-      </p:sp>
-      <p:sp>
-        <p:nvSpPr>
-          <p:cNvPr id="18" name="TextBox 17"/>
-          <p:cNvSpPr txBox="1"/>
-          <p:nvPr/>
-        </p:nvSpPr>
-        <p:spPr>
-          <a:xfrm>
-            <a:off x="8595360" y="3840480"/>
-            <a:ext cx="3703320" cy="365760"/>
-          </a:xfrm>
-          <a:prstGeom prst="rect">
-            <a:avLst/>
-          </a:prstGeom>
-          <a:noFill/>
-        </p:spPr>
-        <p:txBody>
-          <a:bodyPr wrap="square" lIns="45720" rIns="45720" tIns="18288" bIns="18288">
-            <a:spAutoFit/>
-          </a:bodyPr>
-          <a:lstStyle/>
-          <a:p>
-            <a:pPr algn="l"/>
-            <a:r>
-              <a:rPr sz="1050" b="0">
-                <a:solidFill>
-                  <a:srgbClr val="334455"/>
-                </a:solidFill>
-                <a:latin typeface="Calibri"/>
-              </a:rPr>
-              <a:t>Flagged position underperforms 59.9% overall</a:t>
-            </a:r>
-          </a:p>
-          <a:p>
-            <a:pPr algn="l"/>
-            <a:r>
-              <a:rPr sz="1050" b="0">
-                <a:solidFill>
-                  <a:srgbClr val="334455"/>
-                </a:solidFill>
-                <a:latin typeface="Calibri"/>
-              </a:rPr>
-              <a:t>(p=0.012)  ·  2B 74.2% (p=0.011)</a:t>
-            </a:r>
-          </a:p>
-        </p:txBody>
-      </p:sp>
-      <p:sp>
-        <p:nvSpPr>
-          <p:cNvPr id="19" name="TextBox 18"/>
-          <p:cNvSpPr txBox="1"/>
-          <p:nvPr/>
-        </p:nvSpPr>
-        <p:spPr>
-          <a:xfrm>
-            <a:off x="8595360" y="4297680"/>
-            <a:ext cx="3703320" cy="256032"/>
-          </a:xfrm>
-          <a:prstGeom prst="rect">
-            <a:avLst/>
-          </a:prstGeom>
-          <a:noFill/>
-        </p:spPr>
-        <p:txBody>
-          <a:bodyPr wrap="square" lIns="45720" rIns="45720" tIns="18288" bIns="18288">
-            <a:spAutoFit/>
-          </a:bodyPr>
-          <a:lstStyle/>
-          <a:p>
-            <a:pPr algn="l"/>
-            <a:r>
-              <a:rPr sz="1150" b="1">
-                <a:solidFill>
-                  <a:srgbClr val="C08C00"/>
-                </a:solidFill>
-                <a:latin typeface="Calibri"/>
-              </a:rPr>
-              <a:t>Honest null reported</a:t>
-            </a:r>
-          </a:p>
-        </p:txBody>
-      </p:sp>
-      <p:sp>
-        <p:nvSpPr>
-          <p:cNvPr id="20" name="TextBox 19"/>
-          <p:cNvSpPr txBox="1"/>
-          <p:nvPr/>
-        </p:nvSpPr>
-        <p:spPr>
-          <a:xfrm>
-            <a:off x="8595360" y="4526280"/>
-            <a:ext cx="3703320" cy="640080"/>
-          </a:xfrm>
-          <a:prstGeom prst="rect">
-            <a:avLst/>
-          </a:prstGeom>
-          <a:noFill/>
-        </p:spPr>
-        <p:txBody>
-          <a:bodyPr wrap="square" lIns="45720" rIns="45720" tIns="18288" bIns="18288">
-            <a:spAutoFit/>
-          </a:bodyPr>
-          <a:lstStyle/>
-          <a:p>
-            <a:pPr algn="l"/>
-            <a:r>
-              <a:rPr sz="1050" b="0">
-                <a:solidFill>
-                  <a:srgbClr val="334455"/>
-                </a:solidFill>
-                <a:latin typeface="Calibri"/>
-              </a:rPr>
-              <a:t>Gap_score does NOT predict next-year wins —</a:t>
-            </a:r>
-          </a:p>
-          <a:p>
-            <a:pPr algn="l"/>
-            <a:r>
-              <a:rPr sz="1050" b="0">
-                <a:solidFill>
-                  <a:srgbClr val="334455"/>
-                </a:solidFill>
-                <a:latin typeface="Calibri"/>
-              </a:rPr>
-              <a:t>loses to autocorrelation ~5×. Five independent</a:t>
-            </a:r>
-          </a:p>
-          <a:p>
-            <a:pPr algn="l"/>
-            <a:r>
-              <a:rPr sz="1050" b="0">
-                <a:solidFill>
-                  <a:srgbClr val="334455"/>
-                </a:solidFill>
-                <a:latin typeface="Calibri"/>
-              </a:rPr>
-              <a:t>tests confirm. Reported plainly, not dressed up.</a:t>
-            </a:r>
-          </a:p>
-        </p:txBody>
-      </p:sp>
-      <p:sp>
-        <p:nvSpPr>
-          <p:cNvPr id="21" name="Rectangle 20"/>
+              <a:t>n=43 · z=5.66 · p&lt;0.0001</a:t>
+            </a:r>
+          </a:p>
+        </p:txBody>
+      </p:sp>
+      <p:sp>
+        <p:nvSpPr>
+          <p:cNvPr id="17" name="Rounded Rectangle 16"/>
           <p:cNvSpPr/>
           <p:nvPr/>
         </p:nvSpPr>
         <p:spPr>
           <a:xfrm>
-            <a:off x="8595360" y="5166360"/>
-            <a:ext cx="3703320" cy="45720"/>
-          </a:xfrm>
-          <a:prstGeom prst="rect">
-            <a:avLst/>
+            <a:off x="6195060" y="1783080"/>
+            <a:ext cx="2571750" cy="1051560"/>
+          </a:xfrm>
+          <a:prstGeom prst="roundRect">
+            <a:avLst>
+              <a:gd name="adj" fmla="val 10000"/>
+            </a:avLst>
           </a:prstGeom>
           <a:solidFill>
-            <a:srgbClr val="102A55"/>
+            <a:srgbClr val="E8F4EA"/>
           </a:solidFill>
-          <a:ln>
-            <a:noFill/>
+          <a:ln w="9525">
+            <a:solidFill>
+              <a:srgbClr val="2E863E"/>
+            </a:solidFill>
           </a:ln>
           <a:effectLst/>
         </p:spPr>
@@ -4207,14 +3685,14 @@
       </p:sp>
       <p:sp>
         <p:nvSpPr>
-          <p:cNvPr id="22" name="TextBox 21"/>
+          <p:cNvPr id="18" name="TextBox 17"/>
           <p:cNvSpPr txBox="1"/>
           <p:nvPr/>
         </p:nvSpPr>
         <p:spPr>
           <a:xfrm>
-            <a:off x="8595360" y="5276088"/>
-            <a:ext cx="3703320" cy="365760"/>
+            <a:off x="6195060" y="1874519"/>
+            <a:ext cx="2571750" cy="502920"/>
           </a:xfrm>
           <a:prstGeom prst="rect">
             <a:avLst/>
@@ -4222,55 +3700,117 @@
           <a:noFill/>
         </p:spPr>
         <p:txBody>
-          <a:bodyPr wrap="square" lIns="45720" rIns="45720" tIns="18288" bIns="18288">
+          <a:bodyPr wrap="square" lIns="36576" rIns="36576" tIns="18288" bIns="18288">
             <a:spAutoFit/>
           </a:bodyPr>
           <a:lstStyle/>
           <a:p>
-            <a:pPr algn="l"/>
-            <a:r>
-              <a:rPr sz="1200" b="1">
-                <a:solidFill>
-                  <a:srgbClr val="102A55"/>
+            <a:pPr algn="ctr"/>
+            <a:r>
+              <a:rPr sz="2800" b="1" i="0">
+                <a:solidFill>
+                  <a:srgbClr val="2E863E"/>
                 </a:solidFill>
                 <a:latin typeface="Calibri"/>
               </a:rPr>
-              <a:t>Sabercast is a diagnostic + retrieval tool,</a:t>
-            </a:r>
-          </a:p>
-          <a:p>
-            <a:pPr algn="l"/>
-            <a:r>
-              <a:rPr sz="1200" b="1">
-                <a:solidFill>
-                  <a:srgbClr val="102A55"/>
-                </a:solidFill>
-                <a:latin typeface="Calibri"/>
-              </a:rPr>
-              <a:t>NOT a wins forecaster.</a:t>
-            </a:r>
-          </a:p>
-        </p:txBody>
-      </p:sp>
-      <p:sp>
-        <p:nvSpPr>
-          <p:cNvPr id="23" name="Rectangle 22"/>
-          <p:cNvSpPr/>
+              <a:t>59.9%</a:t>
+            </a:r>
+          </a:p>
+        </p:txBody>
+      </p:sp>
+      <p:sp>
+        <p:nvSpPr>
+          <p:cNvPr id="19" name="TextBox 18"/>
+          <p:cNvSpPr txBox="1"/>
           <p:nvPr/>
         </p:nvSpPr>
         <p:spPr>
           <a:xfrm>
-            <a:off x="457200" y="6126480"/>
-            <a:ext cx="11277295" cy="22860"/>
+            <a:off x="6195060" y="2386584"/>
+            <a:ext cx="2571750" cy="228600"/>
           </a:xfrm>
           <a:prstGeom prst="rect">
             <a:avLst/>
           </a:prstGeom>
+          <a:noFill/>
+        </p:spPr>
+        <p:txBody>
+          <a:bodyPr wrap="square" lIns="36576" rIns="36576" tIns="18288" bIns="18288">
+            <a:spAutoFit/>
+          </a:bodyPr>
+          <a:lstStyle/>
+          <a:p>
+            <a:pPr algn="ctr"/>
+            <a:r>
+              <a:rPr sz="1000" b="1" i="0">
+                <a:solidFill>
+                  <a:srgbClr val="334455"/>
+                </a:solidFill>
+                <a:latin typeface="Calibri"/>
+              </a:rPr>
+              <a:t>Position hit-rate</a:t>
+            </a:r>
+          </a:p>
+        </p:txBody>
+      </p:sp>
+      <p:sp>
+        <p:nvSpPr>
+          <p:cNvPr id="20" name="TextBox 19"/>
+          <p:cNvSpPr txBox="1"/>
+          <p:nvPr/>
+        </p:nvSpPr>
+        <p:spPr>
+          <a:xfrm>
+            <a:off x="6195060" y="2587752"/>
+            <a:ext cx="2571750" cy="201168"/>
+          </a:xfrm>
+          <a:prstGeom prst="rect">
+            <a:avLst/>
+          </a:prstGeom>
+          <a:noFill/>
+        </p:spPr>
+        <p:txBody>
+          <a:bodyPr wrap="square" lIns="36576" rIns="36576" tIns="18288" bIns="18288">
+            <a:spAutoFit/>
+          </a:bodyPr>
+          <a:lstStyle/>
+          <a:p>
+            <a:pPr algn="ctr"/>
+            <a:r>
+              <a:rPr sz="850" b="0" i="1">
+                <a:solidFill>
+                  <a:srgbClr val="667080"/>
+                </a:solidFill>
+                <a:latin typeface="Calibri"/>
+              </a:rPr>
+              <a:t>p=0.012 · 2B 74% (p=0.011)</a:t>
+            </a:r>
+          </a:p>
+        </p:txBody>
+      </p:sp>
+      <p:sp>
+        <p:nvSpPr>
+          <p:cNvPr id="21" name="Rounded Rectangle 20"/>
+          <p:cNvSpPr/>
+          <p:nvPr/>
+        </p:nvSpPr>
+        <p:spPr>
+          <a:xfrm>
+            <a:off x="8949690" y="1783080"/>
+            <a:ext cx="2571750" cy="1051560"/>
+          </a:xfrm>
+          <a:prstGeom prst="roundRect">
+            <a:avLst>
+              <a:gd name="adj" fmla="val 10000"/>
+            </a:avLst>
+          </a:prstGeom>
           <a:solidFill>
-            <a:srgbClr val="3A82CD"/>
+            <a:srgbClr val="FBF3DC"/>
           </a:solidFill>
-          <a:ln>
-            <a:noFill/>
+          <a:ln w="9525">
+            <a:solidFill>
+              <a:srgbClr val="C08C00"/>
+            </a:solidFill>
           </a:ln>
           <a:effectLst/>
         </p:spPr>
@@ -4298,14 +3838,14 @@
       </p:sp>
       <p:sp>
         <p:nvSpPr>
-          <p:cNvPr id="24" name="TextBox 23"/>
+          <p:cNvPr id="22" name="TextBox 21"/>
           <p:cNvSpPr txBox="1"/>
           <p:nvPr/>
         </p:nvSpPr>
         <p:spPr>
           <a:xfrm>
-            <a:off x="457200" y="6199632"/>
-            <a:ext cx="5486400" cy="274320"/>
+            <a:off x="8949690" y="1874519"/>
+            <a:ext cx="2571750" cy="502920"/>
           </a:xfrm>
           <a:prstGeom prst="rect">
             <a:avLst/>
@@ -4313,34 +3853,34 @@
           <a:noFill/>
         </p:spPr>
         <p:txBody>
-          <a:bodyPr wrap="square" lIns="45720" rIns="45720" tIns="18288" bIns="18288">
+          <a:bodyPr wrap="square" lIns="36576" rIns="36576" tIns="18288" bIns="18288">
             <a:spAutoFit/>
           </a:bodyPr>
           <a:lstStyle/>
           <a:p>
-            <a:pPr algn="l"/>
-            <a:r>
-              <a:rPr sz="1200" b="1">
-                <a:solidFill>
-                  <a:srgbClr val="102A55"/>
+            <a:pPr algn="ctr"/>
+            <a:r>
+              <a:rPr sz="2800" b="1" i="0">
+                <a:solidFill>
+                  <a:srgbClr val="C08C00"/>
                 </a:solidFill>
                 <a:latin typeface="Calibri"/>
               </a:rPr>
-              <a:t>Live  ·  sabercast-mlb.streamlit.app</a:t>
-            </a:r>
-          </a:p>
-        </p:txBody>
-      </p:sp>
-      <p:sp>
-        <p:nvSpPr>
-          <p:cNvPr id="25" name="TextBox 24"/>
+              <a:t>4 / 10</a:t>
+            </a:r>
+          </a:p>
+        </p:txBody>
+      </p:sp>
+      <p:sp>
+        <p:nvSpPr>
+          <p:cNvPr id="23" name="TextBox 22"/>
           <p:cNvSpPr txBox="1"/>
           <p:nvPr/>
         </p:nvSpPr>
         <p:spPr>
           <a:xfrm>
-            <a:off x="5943600" y="6199632"/>
-            <a:ext cx="5790895" cy="274320"/>
+            <a:off x="8949690" y="2386584"/>
+            <a:ext cx="2571750" cy="228600"/>
           </a:xfrm>
           <a:prstGeom prst="rect">
             <a:avLst/>
@@ -4348,34 +3888,34 @@
           <a:noFill/>
         </p:spPr>
         <p:txBody>
-          <a:bodyPr wrap="square" lIns="45720" rIns="45720" tIns="18288" bIns="18288">
+          <a:bodyPr wrap="square" lIns="36576" rIns="36576" tIns="18288" bIns="18288">
             <a:spAutoFit/>
           </a:bodyPr>
           <a:lstStyle/>
           <a:p>
-            <a:pPr algn="r"/>
-            <a:r>
-              <a:rPr sz="1200" b="1">
-                <a:solidFill>
-                  <a:srgbClr val="102A55"/>
+            <a:pPr algn="ctr"/>
+            <a:r>
+              <a:rPr sz="1000" b="1" i="0">
+                <a:solidFill>
+                  <a:srgbClr val="334455"/>
                 </a:solidFill>
                 <a:latin typeface="Calibri"/>
               </a:rPr>
-              <a:t>Source · github.com/rwpeugh/sabercast</a:t>
-            </a:r>
-          </a:p>
-        </p:txBody>
-      </p:sp>
-      <p:sp>
-        <p:nvSpPr>
-          <p:cNvPr id="26" name="TextBox 25"/>
+              <a:t>Significant findings</a:t>
+            </a:r>
+          </a:p>
+        </p:txBody>
+      </p:sp>
+      <p:sp>
+        <p:nvSpPr>
+          <p:cNvPr id="24" name="TextBox 23"/>
           <p:cNvSpPr txBox="1"/>
           <p:nvPr/>
         </p:nvSpPr>
         <p:spPr>
           <a:xfrm>
-            <a:off x="457200" y="6492240"/>
-            <a:ext cx="11277295" cy="228600"/>
+            <a:off x="8949690" y="2587752"/>
+            <a:ext cx="2571750" cy="201168"/>
           </a:xfrm>
           <a:prstGeom prst="rect">
             <a:avLst/>
@@ -4383,20 +3923,803 @@
           <a:noFill/>
         </p:spPr>
         <p:txBody>
-          <a:bodyPr wrap="square" lIns="45720" rIns="45720" tIns="18288" bIns="18288">
+          <a:bodyPr wrap="square" lIns="36576" rIns="36576" tIns="18288" bIns="18288">
             <a:spAutoFit/>
           </a:bodyPr>
           <a:lstStyle/>
           <a:p>
-            <a:pPr algn="l"/>
-            <a:r>
-              <a:rPr sz="900" b="0">
+            <a:pPr algn="ctr"/>
+            <a:r>
+              <a:rPr sz="850" b="0" i="1">
                 <a:solidFill>
                   <a:srgbClr val="667080"/>
                 </a:solidFill>
                 <a:latin typeface="Calibri"/>
               </a:rPr>
-              <a:t>MKTG 569 · Building Business Applications of LLMs and Generative Models · Spring 2026</a:t>
+              <a:t>5 nulls reported honestly</a:t>
+            </a:r>
+          </a:p>
+        </p:txBody>
+      </p:sp>
+      <p:sp>
+        <p:nvSpPr>
+          <p:cNvPr id="25" name="Rounded Rectangle 24"/>
+          <p:cNvSpPr/>
+          <p:nvPr/>
+        </p:nvSpPr>
+        <p:spPr>
+          <a:xfrm>
+            <a:off x="649224" y="3026664"/>
+            <a:ext cx="6885432" cy="2313432"/>
+          </a:xfrm>
+          <a:prstGeom prst="roundRect">
+            <a:avLst>
+              <a:gd name="adj" fmla="val 10000"/>
+            </a:avLst>
+          </a:prstGeom>
+          <a:solidFill>
+            <a:srgbClr val="FFFFFF"/>
+          </a:solidFill>
+          <a:ln w="9525">
+            <a:solidFill>
+              <a:srgbClr val="3A82CD"/>
+            </a:solidFill>
+          </a:ln>
+          <a:effectLst/>
+        </p:spPr>
+        <p:style>
+          <a:lnRef idx="1">
+            <a:schemeClr val="accent1"/>
+          </a:lnRef>
+          <a:fillRef idx="3">
+            <a:schemeClr val="accent1"/>
+          </a:fillRef>
+          <a:effectRef idx="2">
+            <a:schemeClr val="accent1"/>
+          </a:effectRef>
+          <a:fontRef idx="minor">
+            <a:schemeClr val="lt1"/>
+          </a:fontRef>
+        </p:style>
+        <p:txBody>
+          <a:bodyPr rtlCol="0" anchor="ctr"/>
+          <a:lstStyle/>
+          <a:p>
+            <a:pPr algn="ctr"/>
+          </a:p>
+        </p:txBody>
+      </p:sp>
+      <p:pic>
+        <p:nvPicPr>
+          <p:cNvPr id="26" name="Picture 25" descr="03_top_gap_card_with_candidates.png"/>
+          <p:cNvPicPr>
+            <a:picLocks noChangeAspect="1"/>
+          </p:cNvPicPr>
+          <p:nvPr/>
+        </p:nvPicPr>
+        <p:blipFill>
+          <a:blip r:embed="rId4"/>
+          <a:stretch>
+            <a:fillRect/>
+          </a:stretch>
+        </p:blipFill>
+        <p:spPr>
+          <a:xfrm>
+            <a:off x="2441207" y="3063240"/>
+            <a:ext cx="3301465" cy="2240280"/>
+          </a:xfrm>
+          <a:prstGeom prst="rect">
+            <a:avLst/>
+          </a:prstGeom>
+        </p:spPr>
+      </p:pic>
+      <p:sp>
+        <p:nvSpPr>
+          <p:cNvPr id="27" name="TextBox 26"/>
+          <p:cNvSpPr txBox="1"/>
+          <p:nvPr/>
+        </p:nvSpPr>
+        <p:spPr>
+          <a:xfrm>
+            <a:off x="685800" y="5349240"/>
+            <a:ext cx="6812280" cy="201168"/>
+          </a:xfrm>
+          <a:prstGeom prst="rect">
+            <a:avLst/>
+          </a:prstGeom>
+          <a:noFill/>
+        </p:spPr>
+        <p:txBody>
+          <a:bodyPr wrap="square" lIns="36576" rIns="36576" tIns="18288" bIns="18288">
+            <a:spAutoFit/>
+          </a:bodyPr>
+          <a:lstStyle/>
+          <a:p>
+            <a:pPr algn="l"/>
+            <a:r>
+              <a:rPr sz="900" b="0" i="1">
+                <a:solidFill>
+                  <a:srgbClr val="667080"/>
+                </a:solidFill>
+                <a:latin typeface="Calibri"/>
+              </a:rPr>
+              <a:t>Live Gap Filler output — gap diagnosis + 3 recommended targets + pricing comparables</a:t>
+            </a:r>
+          </a:p>
+        </p:txBody>
+      </p:sp>
+      <p:sp>
+        <p:nvSpPr>
+          <p:cNvPr id="28" name="TextBox 27"/>
+          <p:cNvSpPr txBox="1"/>
+          <p:nvPr/>
+        </p:nvSpPr>
+        <p:spPr>
+          <a:xfrm>
+            <a:off x="7726679" y="3063240"/>
+            <a:ext cx="3794760" cy="228600"/>
+          </a:xfrm>
+          <a:prstGeom prst="rect">
+            <a:avLst/>
+          </a:prstGeom>
+          <a:noFill/>
+        </p:spPr>
+        <p:txBody>
+          <a:bodyPr wrap="square" lIns="36576" rIns="36576" tIns="18288" bIns="18288">
+            <a:spAutoFit/>
+          </a:bodyPr>
+          <a:lstStyle/>
+          <a:p>
+            <a:pPr algn="l"/>
+            <a:r>
+              <a:rPr sz="1050" b="1" i="0">
+                <a:solidFill>
+                  <a:srgbClr val="3A82CD"/>
+                </a:solidFill>
+                <a:latin typeface="Calibri"/>
+              </a:rPr>
+              <a:t>THREE WORKFLOWS</a:t>
+            </a:r>
+          </a:p>
+        </p:txBody>
+      </p:sp>
+      <p:sp>
+        <p:nvSpPr>
+          <p:cNvPr id="29" name="TextBox 28"/>
+          <p:cNvSpPr txBox="1"/>
+          <p:nvPr/>
+        </p:nvSpPr>
+        <p:spPr>
+          <a:xfrm>
+            <a:off x="7726679" y="3310128"/>
+            <a:ext cx="3794760" cy="685800"/>
+          </a:xfrm>
+          <a:prstGeom prst="rect">
+            <a:avLst/>
+          </a:prstGeom>
+          <a:noFill/>
+        </p:spPr>
+        <p:txBody>
+          <a:bodyPr wrap="square" lIns="36576" rIns="36576" tIns="18288" bIns="18288">
+            <a:spAutoFit/>
+          </a:bodyPr>
+          <a:lstStyle/>
+          <a:p>
+            <a:pPr algn="l"/>
+            <a:r>
+              <a:rPr sz="1000" b="0" i="0">
+                <a:solidFill>
+                  <a:srgbClr val="334455"/>
+                </a:solidFill>
+                <a:latin typeface="Calibri"/>
+              </a:rPr>
+              <a:t>• Roster Builder — day-to-day lineup</a:t>
+            </a:r>
+          </a:p>
+          <a:p>
+            <a:pPr algn="l"/>
+            <a:r>
+              <a:rPr sz="1000" b="0" i="0">
+                <a:solidFill>
+                  <a:srgbClr val="334455"/>
+                </a:solidFill>
+                <a:latin typeface="Calibri"/>
+              </a:rPr>
+              <a:t>• Opponent Scouting — threats + plan</a:t>
+            </a:r>
+          </a:p>
+          <a:p>
+            <a:pPr algn="l"/>
+            <a:r>
+              <a:rPr sz="1000" b="0" i="0">
+                <a:solidFill>
+                  <a:srgbClr val="334455"/>
+                </a:solidFill>
+                <a:latin typeface="Calibri"/>
+              </a:rPr>
+              <a:t>• Gap Filler — diagnosis + RAG targets</a:t>
+            </a:r>
+          </a:p>
+        </p:txBody>
+      </p:sp>
+      <p:sp>
+        <p:nvSpPr>
+          <p:cNvPr id="30" name="TextBox 29"/>
+          <p:cNvSpPr txBox="1"/>
+          <p:nvPr/>
+        </p:nvSpPr>
+        <p:spPr>
+          <a:xfrm>
+            <a:off x="7726679" y="3977639"/>
+            <a:ext cx="3794760" cy="228600"/>
+          </a:xfrm>
+          <a:prstGeom prst="rect">
+            <a:avLst/>
+          </a:prstGeom>
+          <a:noFill/>
+        </p:spPr>
+        <p:txBody>
+          <a:bodyPr wrap="square" lIns="36576" rIns="36576" tIns="18288" bIns="18288">
+            <a:spAutoFit/>
+          </a:bodyPr>
+          <a:lstStyle/>
+          <a:p>
+            <a:pPr algn="l"/>
+            <a:r>
+              <a:rPr sz="1050" b="1" i="0">
+                <a:solidFill>
+                  <a:srgbClr val="3A82CD"/>
+                </a:solidFill>
+                <a:latin typeface="Calibri"/>
+              </a:rPr>
+              <a:t>DATA + LLM STACK</a:t>
+            </a:r>
+          </a:p>
+        </p:txBody>
+      </p:sp>
+      <p:sp>
+        <p:nvSpPr>
+          <p:cNvPr id="31" name="TextBox 30"/>
+          <p:cNvSpPr txBox="1"/>
+          <p:nvPr/>
+        </p:nvSpPr>
+        <p:spPr>
+          <a:xfrm>
+            <a:off x="7726679" y="4224528"/>
+            <a:ext cx="3794760" cy="685800"/>
+          </a:xfrm>
+          <a:prstGeom prst="rect">
+            <a:avLst/>
+          </a:prstGeom>
+          <a:noFill/>
+        </p:spPr>
+        <p:txBody>
+          <a:bodyPr wrap="square" lIns="36576" rIns="36576" tIns="18288" bIns="18288">
+            <a:spAutoFit/>
+          </a:bodyPr>
+          <a:lstStyle/>
+          <a:p>
+            <a:pPr algn="l"/>
+            <a:r>
+              <a:rPr sz="1000" b="0" i="0">
+                <a:solidFill>
+                  <a:srgbClr val="334455"/>
+                </a:solidFill>
+                <a:latin typeface="Calibri"/>
+              </a:rPr>
+              <a:t>pybaseball · Spotrac · Statcast</a:t>
+            </a:r>
+          </a:p>
+          <a:p>
+            <a:pPr algn="l"/>
+            <a:r>
+              <a:rPr sz="1000" b="0" i="0">
+                <a:solidFill>
+                  <a:srgbClr val="334455"/>
+                </a:solidFill>
+                <a:latin typeface="Calibri"/>
+              </a:rPr>
+              <a:t>gpt-4o + 4o-mini · text-embed-3</a:t>
+            </a:r>
+          </a:p>
+          <a:p>
+            <a:pPr algn="l"/>
+            <a:r>
+              <a:rPr sz="1000" b="0" i="0">
+                <a:solidFill>
+                  <a:srgbClr val="334455"/>
+                </a:solidFill>
+                <a:latin typeface="Calibri"/>
+              </a:rPr>
+              <a:t>ChromaDB RAG (999 players)</a:t>
+            </a:r>
+          </a:p>
+        </p:txBody>
+      </p:sp>
+      <p:sp>
+        <p:nvSpPr>
+          <p:cNvPr id="32" name="TextBox 31"/>
+          <p:cNvSpPr txBox="1"/>
+          <p:nvPr/>
+        </p:nvSpPr>
+        <p:spPr>
+          <a:xfrm>
+            <a:off x="7726679" y="4892040"/>
+            <a:ext cx="3794760" cy="228600"/>
+          </a:xfrm>
+          <a:prstGeom prst="rect">
+            <a:avLst/>
+          </a:prstGeom>
+          <a:noFill/>
+        </p:spPr>
+        <p:txBody>
+          <a:bodyPr wrap="square" lIns="36576" rIns="36576" tIns="18288" bIns="18288">
+            <a:spAutoFit/>
+          </a:bodyPr>
+          <a:lstStyle/>
+          <a:p>
+            <a:pPr algn="l"/>
+            <a:r>
+              <a:rPr sz="1050" b="1" i="0">
+                <a:solidFill>
+                  <a:srgbClr val="3A82CD"/>
+                </a:solidFill>
+                <a:latin typeface="Calibri"/>
+              </a:rPr>
+              <a:t>BUILD ECONOMICS</a:t>
+            </a:r>
+          </a:p>
+        </p:txBody>
+      </p:sp>
+      <p:sp>
+        <p:nvSpPr>
+          <p:cNvPr id="33" name="TextBox 32"/>
+          <p:cNvSpPr txBox="1"/>
+          <p:nvPr/>
+        </p:nvSpPr>
+        <p:spPr>
+          <a:xfrm>
+            <a:off x="7726679" y="5138928"/>
+            <a:ext cx="3794760" cy="274320"/>
+          </a:xfrm>
+          <a:prstGeom prst="rect">
+            <a:avLst/>
+          </a:prstGeom>
+          <a:noFill/>
+        </p:spPr>
+        <p:txBody>
+          <a:bodyPr wrap="square" lIns="36576" rIns="36576" tIns="18288" bIns="18288">
+            <a:spAutoFit/>
+          </a:bodyPr>
+          <a:lstStyle/>
+          <a:p>
+            <a:pPr algn="l"/>
+            <a:r>
+              <a:rPr sz="1000" b="0" i="0">
+                <a:solidFill>
+                  <a:srgbClr val="334455"/>
+                </a:solidFill>
+                <a:latin typeface="Calibri"/>
+              </a:rPr>
+              <a:t>9-day build  ·  ~$47 platform spend</a:t>
+            </a:r>
+          </a:p>
+        </p:txBody>
+      </p:sp>
+      <p:sp>
+        <p:nvSpPr>
+          <p:cNvPr id="34" name="Rectangle 33"/>
+          <p:cNvSpPr/>
+          <p:nvPr/>
+        </p:nvSpPr>
+        <p:spPr>
+          <a:xfrm>
+            <a:off x="685800" y="5623560"/>
+            <a:ext cx="10835640" cy="22860"/>
+          </a:xfrm>
+          <a:prstGeom prst="rect">
+            <a:avLst/>
+          </a:prstGeom>
+          <a:solidFill>
+            <a:srgbClr val="102A55"/>
+          </a:solidFill>
+          <a:ln>
+            <a:noFill/>
+          </a:ln>
+          <a:effectLst/>
+        </p:spPr>
+        <p:style>
+          <a:lnRef idx="1">
+            <a:schemeClr val="accent1"/>
+          </a:lnRef>
+          <a:fillRef idx="3">
+            <a:schemeClr val="accent1"/>
+          </a:fillRef>
+          <a:effectRef idx="2">
+            <a:schemeClr val="accent1"/>
+          </a:effectRef>
+          <a:fontRef idx="minor">
+            <a:schemeClr val="lt1"/>
+          </a:fontRef>
+        </p:style>
+        <p:txBody>
+          <a:bodyPr rtlCol="0" anchor="ctr"/>
+          <a:lstStyle/>
+          <a:p>
+            <a:pPr algn="ctr"/>
+          </a:p>
+        </p:txBody>
+      </p:sp>
+      <p:sp>
+        <p:nvSpPr>
+          <p:cNvPr id="35" name="TextBox 34"/>
+          <p:cNvSpPr txBox="1"/>
+          <p:nvPr/>
+        </p:nvSpPr>
+        <p:spPr>
+          <a:xfrm>
+            <a:off x="685800" y="5715000"/>
+            <a:ext cx="6858000" cy="274320"/>
+          </a:xfrm>
+          <a:prstGeom prst="rect">
+            <a:avLst/>
+          </a:prstGeom>
+          <a:noFill/>
+        </p:spPr>
+        <p:txBody>
+          <a:bodyPr wrap="square" lIns="36576" rIns="36576" tIns="18288" bIns="18288">
+            <a:spAutoFit/>
+          </a:bodyPr>
+          <a:lstStyle/>
+          <a:p>
+            <a:pPr algn="l"/>
+            <a:r>
+              <a:rPr sz="1200" b="1" i="0">
+                <a:solidFill>
+                  <a:srgbClr val="102A55"/>
+                </a:solidFill>
+                <a:latin typeface="Calibri"/>
+              </a:rPr>
+              <a:t>Diagnostic + retrieval tool — NOT a wins forecaster.</a:t>
+            </a:r>
+          </a:p>
+        </p:txBody>
+      </p:sp>
+      <p:sp>
+        <p:nvSpPr>
+          <p:cNvPr id="36" name="TextBox 35"/>
+          <p:cNvSpPr txBox="1"/>
+          <p:nvPr/>
+        </p:nvSpPr>
+        <p:spPr>
+          <a:xfrm>
+            <a:off x="7315200" y="5733288"/>
+            <a:ext cx="4206240" cy="274320"/>
+          </a:xfrm>
+          <a:prstGeom prst="rect">
+            <a:avLst/>
+          </a:prstGeom>
+          <a:noFill/>
+        </p:spPr>
+        <p:txBody>
+          <a:bodyPr wrap="square" lIns="36576" rIns="36576" tIns="18288" bIns="18288">
+            <a:spAutoFit/>
+          </a:bodyPr>
+          <a:lstStyle/>
+          <a:p>
+            <a:pPr algn="r"/>
+            <a:r>
+              <a:rPr sz="1000" b="0" i="1">
+                <a:solidFill>
+                  <a:srgbClr val="667080"/>
+                </a:solidFill>
+                <a:latin typeface="Calibri"/>
+              </a:rPr>
+              <a:t>Five wins-prediction nulls reported plainly.</a:t>
+            </a:r>
+          </a:p>
+        </p:txBody>
+      </p:sp>
+      <p:sp>
+        <p:nvSpPr>
+          <p:cNvPr id="37" name="TextBox 36"/>
+          <p:cNvSpPr txBox="1"/>
+          <p:nvPr/>
+        </p:nvSpPr>
+        <p:spPr>
+          <a:xfrm>
+            <a:off x="2735427" y="6126480"/>
+            <a:ext cx="1051560" cy="365760"/>
+          </a:xfrm>
+          <a:prstGeom prst="rect">
+            <a:avLst/>
+          </a:prstGeom>
+          <a:noFill/>
+        </p:spPr>
+        <p:txBody>
+          <a:bodyPr wrap="square" lIns="36576" rIns="36576" tIns="18288" bIns="18288" anchor="ctr">
+            <a:spAutoFit/>
+          </a:bodyPr>
+          <a:lstStyle/>
+          <a:p>
+            <a:pPr algn="ctr"/>
+            <a:r>
+              <a:rPr sz="1100" b="1" i="0">
+                <a:solidFill>
+                  <a:srgbClr val="102A55"/>
+                </a:solidFill>
+                <a:latin typeface="Calibri"/>
+              </a:rPr>
+              <a:t>Powered by</a:t>
+            </a:r>
+          </a:p>
+        </p:txBody>
+      </p:sp>
+      <p:pic>
+        <p:nvPicPr>
+          <p:cNvPr id="38" name="Picture 37" descr="openai.png.png"/>
+          <p:cNvPicPr>
+            <a:picLocks noChangeAspect="1"/>
+          </p:cNvPicPr>
+          <p:nvPr/>
+        </p:nvPicPr>
+        <p:blipFill>
+          <a:blip r:embed="rId5"/>
+          <a:stretch>
+            <a:fillRect/>
+          </a:stretch>
+        </p:blipFill>
+        <p:spPr>
+          <a:xfrm>
+            <a:off x="4335627" y="6126480"/>
+            <a:ext cx="365760" cy="365760"/>
+          </a:xfrm>
+          <a:prstGeom prst="rect">
+            <a:avLst/>
+          </a:prstGeom>
+        </p:spPr>
+      </p:pic>
+      <p:pic>
+        <p:nvPicPr>
+          <p:cNvPr id="39" name="Picture 38" descr="together_ai.png.png"/>
+          <p:cNvPicPr>
+            <a:picLocks noChangeAspect="1"/>
+          </p:cNvPicPr>
+          <p:nvPr/>
+        </p:nvPicPr>
+        <p:blipFill>
+          <a:blip r:embed="rId6"/>
+          <a:stretch>
+            <a:fillRect/>
+          </a:stretch>
+        </p:blipFill>
+        <p:spPr>
+          <a:xfrm>
+            <a:off x="5432907" y="6126480"/>
+            <a:ext cx="365760" cy="365760"/>
+          </a:xfrm>
+          <a:prstGeom prst="rect">
+            <a:avLst/>
+          </a:prstGeom>
+        </p:spPr>
+      </p:pic>
+      <p:pic>
+        <p:nvPicPr>
+          <p:cNvPr id="40" name="Picture 39" descr="chromadb.png"/>
+          <p:cNvPicPr>
+            <a:picLocks noChangeAspect="1"/>
+          </p:cNvPicPr>
+          <p:nvPr/>
+        </p:nvPicPr>
+        <p:blipFill>
+          <a:blip r:embed="rId7"/>
+          <a:stretch>
+            <a:fillRect/>
+          </a:stretch>
+        </p:blipFill>
+        <p:spPr>
+          <a:xfrm>
+            <a:off x="6461607" y="6126480"/>
+            <a:ext cx="365760" cy="365760"/>
+          </a:xfrm>
+          <a:prstGeom prst="rect">
+            <a:avLst/>
+          </a:prstGeom>
+        </p:spPr>
+      </p:pic>
+      <p:pic>
+        <p:nvPicPr>
+          <p:cNvPr id="41" name="Picture 40" descr="streamlit.png.png"/>
+          <p:cNvPicPr>
+            <a:picLocks noChangeAspect="1"/>
+          </p:cNvPicPr>
+          <p:nvPr/>
+        </p:nvPicPr>
+        <p:blipFill>
+          <a:blip r:embed="rId8"/>
+          <a:stretch>
+            <a:fillRect/>
+          </a:stretch>
+        </p:blipFill>
+        <p:spPr>
+          <a:xfrm>
+            <a:off x="7421727" y="6126480"/>
+            <a:ext cx="365760" cy="365760"/>
+          </a:xfrm>
+          <a:prstGeom prst="rect">
+            <a:avLst/>
+          </a:prstGeom>
+        </p:spPr>
+      </p:pic>
+      <p:pic>
+        <p:nvPicPr>
+          <p:cNvPr id="42" name="Picture 41" descr="Baseball_Reference_Logo.svg.png"/>
+          <p:cNvPicPr>
+            <a:picLocks noChangeAspect="1"/>
+          </p:cNvPicPr>
+          <p:nvPr/>
+        </p:nvPicPr>
+        <p:blipFill>
+          <a:blip r:embed="rId9"/>
+          <a:stretch>
+            <a:fillRect/>
+          </a:stretch>
+        </p:blipFill>
+        <p:spPr>
+          <a:xfrm>
+            <a:off x="8267547" y="6204108"/>
+            <a:ext cx="1188720" cy="210502"/>
+          </a:xfrm>
+          <a:prstGeom prst="rect">
+            <a:avLst/>
+          </a:prstGeom>
+        </p:spPr>
+      </p:pic>
+      <p:sp>
+        <p:nvSpPr>
+          <p:cNvPr id="43" name="Rectangle 42"/>
+          <p:cNvSpPr/>
+          <p:nvPr/>
+        </p:nvSpPr>
+        <p:spPr>
+          <a:xfrm>
+            <a:off x="685800" y="6537960"/>
+            <a:ext cx="10835640" cy="13716"/>
+          </a:xfrm>
+          <a:prstGeom prst="rect">
+            <a:avLst/>
+          </a:prstGeom>
+          <a:solidFill>
+            <a:srgbClr val="667080"/>
+          </a:solidFill>
+          <a:ln>
+            <a:noFill/>
+          </a:ln>
+          <a:effectLst/>
+        </p:spPr>
+        <p:style>
+          <a:lnRef idx="1">
+            <a:schemeClr val="accent1"/>
+          </a:lnRef>
+          <a:fillRef idx="3">
+            <a:schemeClr val="accent1"/>
+          </a:fillRef>
+          <a:effectRef idx="2">
+            <a:schemeClr val="accent1"/>
+          </a:effectRef>
+          <a:fontRef idx="minor">
+            <a:schemeClr val="lt1"/>
+          </a:fontRef>
+        </p:style>
+        <p:txBody>
+          <a:bodyPr rtlCol="0" anchor="ctr"/>
+          <a:lstStyle/>
+          <a:p>
+            <a:pPr algn="ctr"/>
+          </a:p>
+        </p:txBody>
+      </p:sp>
+      <p:sp>
+        <p:nvSpPr>
+          <p:cNvPr id="44" name="TextBox 43"/>
+          <p:cNvSpPr txBox="1"/>
+          <p:nvPr/>
+        </p:nvSpPr>
+        <p:spPr>
+          <a:xfrm>
+            <a:off x="685800" y="6583680"/>
+            <a:ext cx="4572000" cy="228600"/>
+          </a:xfrm>
+          <a:prstGeom prst="rect">
+            <a:avLst/>
+          </a:prstGeom>
+          <a:noFill/>
+        </p:spPr>
+        <p:txBody>
+          <a:bodyPr wrap="square" lIns="36576" rIns="36576" tIns="18288" bIns="18288">
+            <a:spAutoFit/>
+          </a:bodyPr>
+          <a:lstStyle/>
+          <a:p>
+            <a:pPr algn="l"/>
+            <a:r>
+              <a:rPr sz="1000" b="1" i="0">
+                <a:solidFill>
+                  <a:srgbClr val="102A55"/>
+                </a:solidFill>
+                <a:latin typeface="Calibri"/>
+              </a:rPr>
+              <a:t>Live  ·  sabercast-mlb.streamlit.app</a:t>
+            </a:r>
+          </a:p>
+        </p:txBody>
+      </p:sp>
+      <p:sp>
+        <p:nvSpPr>
+          <p:cNvPr id="45" name="TextBox 44"/>
+          <p:cNvSpPr txBox="1"/>
+          <p:nvPr/>
+        </p:nvSpPr>
+        <p:spPr>
+          <a:xfrm>
+            <a:off x="5029200" y="6583680"/>
+            <a:ext cx="2286000" cy="228600"/>
+          </a:xfrm>
+          <a:prstGeom prst="rect">
+            <a:avLst/>
+          </a:prstGeom>
+          <a:noFill/>
+        </p:spPr>
+        <p:txBody>
+          <a:bodyPr wrap="square" lIns="36576" rIns="36576" tIns="18288" bIns="18288">
+            <a:spAutoFit/>
+          </a:bodyPr>
+          <a:lstStyle/>
+          <a:p>
+            <a:pPr algn="ctr"/>
+            <a:r>
+              <a:rPr sz="900" b="0" i="1">
+                <a:solidFill>
+                  <a:srgbClr val="667080"/>
+                </a:solidFill>
+                <a:latin typeface="Calibri"/>
+              </a:rPr>
+              <a:t>MKTG 569  ·  Spring 2026</a:t>
+            </a:r>
+          </a:p>
+        </p:txBody>
+      </p:sp>
+      <p:sp>
+        <p:nvSpPr>
+          <p:cNvPr id="46" name="TextBox 45"/>
+          <p:cNvSpPr txBox="1"/>
+          <p:nvPr/>
+        </p:nvSpPr>
+        <p:spPr>
+          <a:xfrm>
+            <a:off x="6858000" y="6583680"/>
+            <a:ext cx="4663440" cy="228600"/>
+          </a:xfrm>
+          <a:prstGeom prst="rect">
+            <a:avLst/>
+          </a:prstGeom>
+          <a:noFill/>
+        </p:spPr>
+        <p:txBody>
+          <a:bodyPr wrap="square" lIns="36576" rIns="36576" tIns="18288" bIns="18288">
+            <a:spAutoFit/>
+          </a:bodyPr>
+          <a:lstStyle/>
+          <a:p>
+            <a:pPr algn="r"/>
+            <a:r>
+              <a:rPr sz="1000" b="1" i="0">
+                <a:solidFill>
+                  <a:srgbClr val="102A55"/>
+                </a:solidFill>
+                <a:latin typeface="Calibri"/>
+              </a:rPr>
+              <a:t>github.com/rwpeugh/sabercast</a:t>
             </a:r>
           </a:p>
         </p:txBody>

--- a/docs/demo/Sabercast_Pitch_Slide.pptx
+++ b/docs/demo/Sabercast_Pitch_Slide.pptx
@@ -3224,7 +3224,7 @@
         <p:spPr>
           <a:xfrm>
             <a:off x="685800" y="1005840"/>
-            <a:ext cx="8229600" cy="320040"/>
+            <a:ext cx="10058400" cy="320040"/>
           </a:xfrm>
           <a:prstGeom prst="rect">
             <a:avLst/>
@@ -3245,7 +3245,7 @@
                 </a:solidFill>
                 <a:latin typeface="Calibri"/>
               </a:rPr>
-              <a:t>LLM-powered MLB front-office intelligence</a:t>
+              <a:t>From roster gaps to ranked free-agent targets — in 13 seconds.</a:t>
             </a:r>
           </a:p>
         </p:txBody>
@@ -3280,7 +3280,7 @@
                 </a:solidFill>
                 <a:latin typeface="Calibri"/>
               </a:rPr>
-              <a:t>Built for small / mid-market clubs that need analyst leverage without a 20-person R&amp;D shop.</a:t>
+              <a:t>Plus lineup planning and series scouting. Built for small / mid-market MLB front offices needing analyst leverage without a 20-person R&amp;D shop.</a:t>
             </a:r>
           </a:p>
         </p:txBody>
@@ -3407,7 +3407,7 @@
                 </a:solidFill>
                 <a:latin typeface="Calibri"/>
               </a:rPr>
-              <a:t>+70pp</a:t>
+              <a:t>13 sec</a:t>
             </a:r>
           </a:p>
         </p:txBody>
@@ -3442,7 +3442,7 @@
                 </a:solidFill>
                 <a:latin typeface="Calibri"/>
               </a:rPr>
-              <a:t>RAG accuracy lift</a:t>
+              <a:t>Gap diagnosis to targets</a:t>
             </a:r>
           </a:p>
         </p:txBody>
@@ -3477,7 +3477,7 @@
                 </a:solidFill>
                 <a:latin typeface="Calibri"/>
               </a:rPr>
-              <a:t>20 Qs · McNemar p=0.0005</a:t>
+              <a:t>12 LLM calls parallelized</a:t>
             </a:r>
           </a:p>
         </p:txBody>
@@ -3560,7 +3560,7 @@
                 </a:solidFill>
                 <a:latin typeface="Calibri"/>
               </a:rPr>
-              <a:t>3.1×</a:t>
+              <a:t>+70pp</a:t>
             </a:r>
           </a:p>
         </p:txBody>
@@ -3595,7 +3595,7 @@
                 </a:solidFill>
                 <a:latin typeface="Calibri"/>
               </a:rPr>
-              <a:t>Precision@10 vs random</a:t>
+              <a:t>RAG accuracy lift</a:t>
             </a:r>
           </a:p>
         </p:txBody>
@@ -3630,7 +3630,7 @@
                 </a:solidFill>
                 <a:latin typeface="Calibri"/>
               </a:rPr>
-              <a:t>n=43 · z=5.66 · p&lt;0.0001</a:t>
+              <a:t>20 Qs · McNemar p=0.0005</a:t>
             </a:r>
           </a:p>
         </p:txBody>
@@ -3713,7 +3713,7 @@
                 </a:solidFill>
                 <a:latin typeface="Calibri"/>
               </a:rPr>
-              <a:t>59.9%</a:t>
+              <a:t>3.1×</a:t>
             </a:r>
           </a:p>
         </p:txBody>
@@ -3748,7 +3748,7 @@
                 </a:solidFill>
                 <a:latin typeface="Calibri"/>
               </a:rPr>
-              <a:t>Position hit-rate</a:t>
+              <a:t>Precision@10 lift</a:t>
             </a:r>
           </a:p>
         </p:txBody>
@@ -3783,7 +3783,7 @@
                 </a:solidFill>
                 <a:latin typeface="Calibri"/>
               </a:rPr>
-              <a:t>p=0.012 · 2B 74% (p=0.011)</a:t>
+              <a:t>n=43 · p&lt;0.0001 · finds signings</a:t>
             </a:r>
           </a:p>
         </p:txBody>
@@ -3805,11 +3805,11 @@
             </a:avLst>
           </a:prstGeom>
           <a:solidFill>
-            <a:srgbClr val="FBF3DC"/>
+            <a:srgbClr val="E8F4EA"/>
           </a:solidFill>
           <a:ln w="9525">
             <a:solidFill>
-              <a:srgbClr val="C08C00"/>
+              <a:srgbClr val="2E863E"/>
             </a:solidFill>
           </a:ln>
           <a:effectLst/>
@@ -3862,11 +3862,11 @@
             <a:r>
               <a:rPr sz="2800" b="1" i="0">
                 <a:solidFill>
-                  <a:srgbClr val="C08C00"/>
+                  <a:srgbClr val="2E863E"/>
                 </a:solidFill>
                 <a:latin typeface="Calibri"/>
               </a:rPr>
-              <a:t>4 / 10</a:t>
+              <a:t>59.9%</a:t>
             </a:r>
           </a:p>
         </p:txBody>
@@ -3901,7 +3901,7 @@
                 </a:solidFill>
                 <a:latin typeface="Calibri"/>
               </a:rPr>
-              <a:t>Significant findings</a:t>
+              <a:t>Position-gap hit rate</a:t>
             </a:r>
           </a:p>
         </p:txBody>
@@ -3936,7 +3936,7 @@
                 </a:solidFill>
                 <a:latin typeface="Calibri"/>
               </a:rPr>
-              <a:t>5 nulls reported honestly</a:t>
+              <a:t>p=0.012 · 2B 74% (p=0.011)</a:t>
             </a:r>
           </a:p>
         </p:txBody>
@@ -4043,7 +4043,7 @@
                 </a:solidFill>
                 <a:latin typeface="Calibri"/>
               </a:rPr>
-              <a:t>Live Gap Filler output — gap diagnosis + 3 recommended targets + pricing comparables</a:t>
+              <a:t>Position gap diagnosed  ·  3 free-agent targets ranked  ·  3 pricing comparables</a:t>
             </a:r>
           </a:p>
         </p:txBody>
@@ -4078,7 +4078,7 @@
                 </a:solidFill>
                 <a:latin typeface="Calibri"/>
               </a:rPr>
-              <a:t>THREE WORKFLOWS</a:t>
+              <a:t>THREE GM-OFFICE JOBS</a:t>
             </a:r>
           </a:p>
         </p:txBody>
@@ -4113,7 +4113,7 @@
                 </a:solidFill>
                 <a:latin typeface="Calibri"/>
               </a:rPr>
-              <a:t>• Roster Builder — day-to-day lineup</a:t>
+              <a:t>• Plan tonight's lineup vs. the opponent</a:t>
             </a:r>
           </a:p>
           <a:p>
@@ -4125,7 +4125,7 @@
                 </a:solidFill>
                 <a:latin typeface="Calibri"/>
               </a:rPr>
-              <a:t>• Opponent Scouting — threats + plan</a:t>
+              <a:t>• Scout the team you're facing</a:t>
             </a:r>
           </a:p>
           <a:p>
@@ -4137,7 +4137,7 @@
                 </a:solidFill>
                 <a:latin typeface="Calibri"/>
               </a:rPr>
-              <a:t>• Gap Filler — diagnosis + RAG targets</a:t>
+              <a:t>• Diagnose roster gaps + rank FA targets</a:t>
             </a:r>
           </a:p>
         </p:txBody>
@@ -4359,7 +4359,7 @@
         <p:spPr>
           <a:xfrm>
             <a:off x="685800" y="5715000"/>
-            <a:ext cx="6858000" cy="274320"/>
+            <a:ext cx="6400800" cy="274320"/>
           </a:xfrm>
           <a:prstGeom prst="rect">
             <a:avLst/>
@@ -4380,7 +4380,7 @@
                 </a:solidFill>
                 <a:latin typeface="Calibri"/>
               </a:rPr>
-              <a:t>Diagnostic + retrieval tool — NOT a wins forecaster.</a:t>
+              <a:t>Decision-support tool — not a wins forecaster.</a:t>
             </a:r>
           </a:p>
         </p:txBody>
@@ -4393,8 +4393,8 @@
         </p:nvSpPr>
         <p:spPr>
           <a:xfrm>
-            <a:off x="7315200" y="5733288"/>
-            <a:ext cx="4206240" cy="274320"/>
+            <a:off x="6400800" y="5733288"/>
+            <a:ext cx="5120640" cy="274320"/>
           </a:xfrm>
           <a:prstGeom prst="rect">
             <a:avLst/>
@@ -4415,7 +4415,7 @@
                 </a:solidFill>
                 <a:latin typeface="Calibri"/>
               </a:rPr>
-              <a:t>Five wins-prediction nulls reported plainly.</a:t>
+              <a:t>10 pre-registered tests  ·  4 significant  ·  5 honest nulls reported</a:t>
             </a:r>
           </a:p>
         </p:txBody>
@@ -4628,7 +4628,7 @@
         <p:spPr>
           <a:xfrm>
             <a:off x="685800" y="6583680"/>
-            <a:ext cx="4572000" cy="228600"/>
+            <a:ext cx="5029200" cy="228600"/>
           </a:xfrm>
           <a:prstGeom prst="rect">
             <a:avLst/>
@@ -4649,7 +4649,7 @@
                 </a:solidFill>
                 <a:latin typeface="Calibri"/>
               </a:rPr>
-              <a:t>Live  ·  sabercast-mlb.streamlit.app</a:t>
+              <a:t>Try the live app  ·  sabercast-mlb.streamlit.app</a:t>
             </a:r>
           </a:p>
         </p:txBody>

--- a/docs/demo/Sabercast_Pitch_Slide.pptx
+++ b/docs/demo/Sabercast_Pitch_Slide.pptx
@@ -3442,7 +3442,7 @@
                 </a:solidFill>
                 <a:latin typeface="Calibri"/>
               </a:rPr>
-              <a:t>Gap diagnosis to targets</a:t>
+              <a:t>Decisions in real time</a:t>
             </a:r>
           </a:p>
         </p:txBody>
@@ -3477,7 +3477,7 @@
                 </a:solidFill>
                 <a:latin typeface="Calibri"/>
               </a:rPr>
-              <a:t>12 LLM calls parallelized</a:t>
+              <a:t>Use during trade calls, not after</a:t>
             </a:r>
           </a:p>
         </p:txBody>
@@ -3560,7 +3560,7 @@
                 </a:solidFill>
                 <a:latin typeface="Calibri"/>
               </a:rPr>
-              <a:t>+70pp</a:t>
+              <a:t>3.1×</a:t>
             </a:r>
           </a:p>
         </p:txBody>
@@ -3595,7 +3595,7 @@
                 </a:solidFill>
                 <a:latin typeface="Calibri"/>
               </a:rPr>
-              <a:t>RAG accuracy lift</a:t>
+              <a:t>Better FA recommendations</a:t>
             </a:r>
           </a:p>
         </p:txBody>
@@ -3630,7 +3630,7 @@
                 </a:solidFill>
                 <a:latin typeface="Calibri"/>
               </a:rPr>
-              <a:t>20 Qs · McNemar p=0.0005</a:t>
+              <a:t>Top-10 surfaces players you'd consider</a:t>
             </a:r>
           </a:p>
         </p:txBody>
@@ -3713,7 +3713,7 @@
                 </a:solidFill>
                 <a:latin typeface="Calibri"/>
               </a:rPr>
-              <a:t>3.1×</a:t>
+              <a:t>1,254</a:t>
             </a:r>
           </a:p>
         </p:txBody>
@@ -3748,7 +3748,7 @@
                 </a:solidFill>
                 <a:latin typeface="Calibri"/>
               </a:rPr>
-              <a:t>Precision@10 lift</a:t>
+              <a:t>FA contracts indexed</a:t>
             </a:r>
           </a:p>
         </p:txBody>
@@ -3783,7 +3783,7 @@
                 </a:solidFill>
                 <a:latin typeface="Calibri"/>
               </a:rPr>
-              <a:t>n=43 · p&lt;0.0001 · finds signings</a:t>
+              <a:t>Pricing context for every position</a:t>
             </a:r>
           </a:p>
         </p:txBody>
@@ -3866,7 +3866,7 @@
                 </a:solidFill>
                 <a:latin typeface="Calibri"/>
               </a:rPr>
-              <a:t>59.9%</a:t>
+              <a:t>60%</a:t>
             </a:r>
           </a:p>
         </p:txBody>
@@ -3901,7 +3901,7 @@
                 </a:solidFill>
                 <a:latin typeface="Calibri"/>
               </a:rPr>
-              <a:t>Position-gap hit rate</a:t>
+              <a:t>Validated gap diagnosis</a:t>
             </a:r>
           </a:p>
         </p:txBody>
@@ -3936,7 +3936,7 @@
                 </a:solidFill>
                 <a:latin typeface="Calibri"/>
               </a:rPr>
-              <a:t>p=0.012 · 2B 74% (p=0.011)</a:t>
+              <a:t>Up to 74% at specific positions</a:t>
             </a:r>
           </a:p>
         </p:txBody>
@@ -4172,7 +4172,7 @@
                 </a:solidFill>
                 <a:latin typeface="Calibri"/>
               </a:rPr>
-              <a:t>DATA + LLM STACK</a:t>
+              <a:t>COMPLETE COVERAGE</a:t>
             </a:r>
           </a:p>
         </p:txBody>
@@ -4207,7 +4207,7 @@
                 </a:solidFill>
                 <a:latin typeface="Calibri"/>
               </a:rPr>
-              <a:t>pybaseball · Spotrac · Statcast</a:t>
+              <a:t>All 30 MLB teams</a:t>
             </a:r>
           </a:p>
           <a:p>
@@ -4219,7 +4219,7 @@
                 </a:solidFill>
                 <a:latin typeface="Calibri"/>
               </a:rPr>
-              <a:t>gpt-4o + 4o-mini · text-embed-3</a:t>
+              <a:t>999 player profiles with Statcast</a:t>
             </a:r>
           </a:p>
           <a:p>
@@ -4231,7 +4231,7 @@
                 </a:solidFill>
                 <a:latin typeface="Calibri"/>
               </a:rPr>
-              <a:t>ChromaDB RAG (999 players)</a:t>
+              <a:t>5+ seasons of historical performance</a:t>
             </a:r>
           </a:p>
         </p:txBody>
@@ -4266,7 +4266,7 @@
                 </a:solidFill>
                 <a:latin typeface="Calibri"/>
               </a:rPr>
-              <a:t>BUILD ECONOMICS</a:t>
+              <a:t>READY FOR YOUR WORKFLOW</a:t>
             </a:r>
           </a:p>
         </p:txBody>
@@ -4301,7 +4301,7 @@
                 </a:solidFill>
                 <a:latin typeface="Calibri"/>
               </a:rPr>
-              <a:t>9-day build  ·  ~$47 platform spend</a:t>
+              <a:t>Live web app  ·  no install  ·  try any team</a:t>
             </a:r>
           </a:p>
         </p:txBody>
@@ -4380,7 +4380,7 @@
                 </a:solidFill>
                 <a:latin typeface="Calibri"/>
               </a:rPr>
-              <a:t>Decision-support tool — not a wins forecaster.</a:t>
+              <a:t>Decision support — augments your analysts, doesn't replace them.</a:t>
             </a:r>
           </a:p>
         </p:txBody>
@@ -4415,7 +4415,7 @@
                 </a:solidFill>
                 <a:latin typeface="Calibri"/>
               </a:rPr>
-              <a:t>10 pre-registered tests  ·  4 significant  ·  5 honest nulls reported</a:t>
+              <a:t>Every recommendation cites comparables  ·  diagnosis shows its confidence</a:t>
             </a:r>
           </a:p>
         </p:txBody>
